--- a/decks/Trans_05_Special-Topics-in-Blood-Bank.pptx
+++ b/decks/Trans_05_Special-Topics-in-Blood-Bank.pptx
@@ -30,9 +30,13 @@
     <p:sldId id="278" r:id="rId24"/>
     <p:sldId id="279" r:id="rId25"/>
     <p:sldId id="280" r:id="rId26"/>
+    <p:sldId id="289" r:id="rId40"/>
     <p:sldId id="281" r:id="rId27"/>
+    <p:sldId id="288" r:id="rId39"/>
     <p:sldId id="282" r:id="rId28"/>
+    <p:sldId id="287" r:id="rId38"/>
     <p:sldId id="283" r:id="rId29"/>
+    <p:sldId id="286" r:id="rId37"/>
     <p:sldId id="284" r:id="rId30"/>
     <p:sldId id="285" r:id="rId31"/>
   </p:sldIdLst>
@@ -3477,6 +3481,10 @@
           </a:solidFill>
           <a:ln/>
         </p:spPr>
+        <p:txBody>
+          <a:bodyPr/>
+          <a:p/>
+        </p:txBody>
       </p:sp>
       <p:sp>
         <p:nvSpPr>
@@ -3499,6 +3507,10 @@
           </a:solidFill>
           <a:ln/>
         </p:spPr>
+        <p:txBody>
+          <a:bodyPr/>
+          <a:p/>
+        </p:txBody>
       </p:sp>
       <p:sp>
         <p:nvSpPr>
@@ -3521,6 +3533,10 @@
           </a:solidFill>
           <a:ln/>
         </p:spPr>
+        <p:txBody>
+          <a:bodyPr/>
+          <a:p/>
+        </p:txBody>
       </p:sp>
       <p:sp>
         <p:nvSpPr>
@@ -3543,6 +3559,10 @@
           </a:solidFill>
           <a:ln/>
         </p:spPr>
+        <p:txBody>
+          <a:bodyPr/>
+          <a:p/>
+        </p:txBody>
       </p:sp>
       <p:sp>
         <p:nvSpPr>
@@ -3874,6 +3894,10 @@
           </a:solidFill>
           <a:ln/>
         </p:spPr>
+        <p:txBody>
+          <a:bodyPr/>
+          <a:p/>
+        </p:txBody>
       </p:sp>
       <p:sp>
         <p:nvSpPr>
@@ -3896,6 +3920,10 @@
           </a:solidFill>
           <a:ln/>
         </p:spPr>
+        <p:txBody>
+          <a:bodyPr/>
+          <a:p/>
+        </p:txBody>
       </p:sp>
       <p:sp>
         <p:nvSpPr>
@@ -4152,6 +4180,10 @@
             </a:outerShdw>
           </a:effectLst>
         </p:spPr>
+        <p:txBody>
+          <a:bodyPr/>
+          <a:p/>
+        </p:txBody>
       </p:sp>
       <p:sp>
         <p:nvSpPr>
@@ -4326,6 +4358,10 @@
             </a:outerShdw>
           </a:effectLst>
         </p:spPr>
+        <p:txBody>
+          <a:bodyPr/>
+          <a:p/>
+        </p:txBody>
       </p:sp>
       <p:sp>
         <p:nvSpPr>
@@ -5947,6 +5983,10 @@
           </a:solidFill>
           <a:ln/>
         </p:spPr>
+        <p:txBody>
+          <a:bodyPr/>
+          <a:p/>
+        </p:txBody>
       </p:sp>
       <p:sp>
         <p:nvSpPr>
@@ -5969,6 +6009,10 @@
           </a:solidFill>
           <a:ln/>
         </p:spPr>
+        <p:txBody>
+          <a:bodyPr/>
+          <a:p/>
+        </p:txBody>
       </p:sp>
       <p:sp>
         <p:nvSpPr>
@@ -6230,6 +6274,10 @@
             </a:outerShdw>
           </a:effectLst>
         </p:spPr>
+        <p:txBody>
+          <a:bodyPr/>
+          <a:p/>
+        </p:txBody>
       </p:sp>
       <p:pic>
         <p:nvPicPr>
@@ -6538,6 +6586,10 @@
             </a:outerShdw>
           </a:effectLst>
         </p:spPr>
+        <p:txBody>
+          <a:bodyPr/>
+          <a:p/>
+        </p:txBody>
       </p:sp>
       <p:sp>
         <p:nvSpPr>
@@ -6712,6 +6764,10 @@
             </a:outerShdw>
           </a:effectLst>
         </p:spPr>
+        <p:txBody>
+          <a:bodyPr/>
+          <a:p/>
+        </p:txBody>
       </p:sp>
       <p:sp>
         <p:nvSpPr>
@@ -7102,6 +7158,10 @@
             </a:outerShdw>
           </a:effectLst>
         </p:spPr>
+        <p:txBody>
+          <a:bodyPr/>
+          <a:p/>
+        </p:txBody>
       </p:sp>
       <p:sp>
         <p:nvSpPr>
@@ -7276,6 +7336,10 @@
             </a:outerShdw>
           </a:effectLst>
         </p:spPr>
+        <p:txBody>
+          <a:bodyPr/>
+          <a:p/>
+        </p:txBody>
       </p:sp>
       <p:sp>
         <p:nvSpPr>
@@ -7581,6 +7645,10 @@
           </a:solidFill>
           <a:ln/>
         </p:spPr>
+        <p:txBody>
+          <a:bodyPr/>
+          <a:p/>
+        </p:txBody>
       </p:sp>
       <p:sp>
         <p:nvSpPr>
@@ -7603,6 +7671,10 @@
           </a:solidFill>
           <a:ln/>
         </p:spPr>
+        <p:txBody>
+          <a:bodyPr/>
+          <a:p/>
+        </p:txBody>
       </p:sp>
       <p:sp>
         <p:nvSpPr>
@@ -7859,6 +7931,10 @@
             </a:outerShdw>
           </a:effectLst>
         </p:spPr>
+        <p:txBody>
+          <a:bodyPr/>
+          <a:p/>
+        </p:txBody>
       </p:sp>
       <p:sp>
         <p:nvSpPr>
@@ -7969,6 +8045,10 @@
             </a:outerShdw>
           </a:effectLst>
         </p:spPr>
+        <p:txBody>
+          <a:bodyPr/>
+          <a:p/>
+        </p:txBody>
       </p:sp>
       <p:sp>
         <p:nvSpPr>
@@ -8398,6 +8478,10 @@
             </a:outerShdw>
           </a:effectLst>
         </p:spPr>
+        <p:txBody>
+          <a:bodyPr/>
+          <a:p/>
+        </p:txBody>
       </p:sp>
       <p:sp>
         <p:nvSpPr>
@@ -8724,6 +8808,10 @@
             </a:outerShdw>
           </a:effectLst>
         </p:spPr>
+        <p:txBody>
+          <a:bodyPr/>
+          <a:p/>
+        </p:txBody>
       </p:sp>
       <p:sp>
         <p:nvSpPr>
@@ -8831,6 +8919,10 @@
             </a:outerShdw>
           </a:effectLst>
         </p:spPr>
+        <p:txBody>
+          <a:bodyPr/>
+          <a:p/>
+        </p:txBody>
       </p:sp>
       <p:sp>
         <p:nvSpPr>
@@ -8938,6 +9030,10 @@
             </a:outerShdw>
           </a:effectLst>
         </p:spPr>
+        <p:txBody>
+          <a:bodyPr/>
+          <a:p/>
+        </p:txBody>
       </p:sp>
       <p:sp>
         <p:nvSpPr>
@@ -9045,6 +9141,10 @@
             </a:outerShdw>
           </a:effectLst>
         </p:spPr>
+        <p:txBody>
+          <a:bodyPr/>
+          <a:p/>
+        </p:txBody>
       </p:sp>
       <p:sp>
         <p:nvSpPr>
@@ -9375,6 +9475,10 @@
             </a:outerShdw>
           </a:effectLst>
         </p:spPr>
+        <p:txBody>
+          <a:bodyPr/>
+          <a:p/>
+        </p:txBody>
       </p:sp>
       <p:sp>
         <p:nvSpPr>
@@ -9485,6 +9589,10 @@
             </a:outerShdw>
           </a:effectLst>
         </p:spPr>
+        <p:txBody>
+          <a:bodyPr/>
+          <a:p/>
+        </p:txBody>
       </p:sp>
       <p:sp>
         <p:nvSpPr>
@@ -9914,6 +10022,10 @@
             </a:outerShdw>
           </a:effectLst>
         </p:spPr>
+        <p:txBody>
+          <a:bodyPr/>
+          <a:p/>
+        </p:txBody>
       </p:sp>
       <p:sp>
         <p:nvSpPr>
@@ -10240,6 +10352,10 @@
             </a:outerShdw>
           </a:effectLst>
         </p:spPr>
+        <p:txBody>
+          <a:bodyPr/>
+          <a:p/>
+        </p:txBody>
       </p:sp>
       <p:sp>
         <p:nvSpPr>
@@ -10350,6 +10466,10 @@
             </a:outerShdw>
           </a:effectLst>
         </p:spPr>
+        <p:txBody>
+          <a:bodyPr/>
+          <a:p/>
+        </p:txBody>
       </p:sp>
       <p:sp>
         <p:nvSpPr>
@@ -10779,6 +10899,10 @@
             </a:outerShdw>
           </a:effectLst>
         </p:spPr>
+        <p:txBody>
+          <a:bodyPr/>
+          <a:p/>
+        </p:txBody>
       </p:sp>
       <p:sp>
         <p:nvSpPr>
@@ -11020,6 +11144,10 @@
           </a:solidFill>
           <a:ln/>
         </p:spPr>
+        <p:txBody>
+          <a:bodyPr/>
+          <a:p/>
+        </p:txBody>
       </p:sp>
       <p:sp>
         <p:nvSpPr>
@@ -11042,6 +11170,10 @@
           </a:solidFill>
           <a:ln/>
         </p:spPr>
+        <p:txBody>
+          <a:bodyPr/>
+          <a:p/>
+        </p:txBody>
       </p:sp>
       <p:sp>
         <p:nvSpPr>
@@ -11360,9 +11492,9 @@
               <a:buNone/>
             </a:pPr>
             <a:r>
-              <a:rPr lang="en-US" sz="1350" b="1" dirty="0">
-                <a:solidFill>
-                  <a:srgbClr val="7A0E3C"/>
+              <a:rPr lang="en-US" sz="1350" b="0" dirty="0">
+                <a:solidFill>
+                  <a:srgbClr val="33444F"/>
                 </a:solidFill>
                 <a:latin typeface="Calibri" pitchFamily="34" charset="0"/>
                 <a:ea typeface="Calibri" pitchFamily="34" charset="-122"/>
@@ -11431,130 +11563,6 @@
               <a:t>E. Gestational age only</a:t>
             </a:r>
             <a:endParaRPr lang="en-US" sz="1350" dirty="0"/>
-          </a:p>
-        </p:txBody>
-      </p:sp>
-      <p:sp>
-        <p:nvSpPr>
-          <p:cNvPr id="6" name="Shape 4"/>
-          <p:cNvSpPr/>
-          <p:nvPr/>
-        </p:nvSpPr>
-        <p:spPr>
-          <a:xfrm>
-            <a:off x="7201632" y="2395728"/>
-            <a:ext cx="4423136" cy="3246120"/>
-          </a:xfrm>
-          <a:prstGeom prst="roundRect">
-            <a:avLst>
-              <a:gd name="adj" fmla="val 2535"/>
-            </a:avLst>
-          </a:prstGeom>
-          <a:solidFill>
-            <a:srgbClr val="F8E7EF"/>
-          </a:solidFill>
-          <a:ln/>
-          <a:effectLst>
-            <a:outerShdw sx="100000" sy="100000" kx="0" ky="0" algn="bl" rotWithShape="0" blurRad="88900" dist="25400" dir="5400000">
-              <a:srgbClr val="22303C">
-                <a:alpha val="12000"/>
-              </a:srgbClr>
-            </a:outerShdw>
-          </a:effectLst>
-        </p:spPr>
-      </p:sp>
-      <p:sp>
-        <p:nvSpPr>
-          <p:cNvPr id="7" name="Text 5"/>
-          <p:cNvSpPr/>
-          <p:nvPr/>
-        </p:nvSpPr>
-        <p:spPr>
-          <a:xfrm>
-            <a:off x="7439376" y="2578608"/>
-            <a:ext cx="3965936" cy="457200"/>
-          </a:xfrm>
-          <a:prstGeom prst="rect">
-            <a:avLst/>
-          </a:prstGeom>
-          <a:noFill/>
-          <a:ln/>
-        </p:spPr>
-        <p:txBody>
-          <a:bodyPr wrap="square" lIns="0" tIns="0" rIns="0" bIns="0" rtlCol="0" anchor="ctr"/>
-          <a:lstStyle/>
-          <a:p>
-            <a:pPr indent="0" marL="0">
-              <a:buNone/>
-            </a:pPr>
-            <a:r>
-              <a:rPr lang="en-US" sz="1500" b="1" dirty="0">
-                <a:solidFill>
-                  <a:srgbClr val="AD1457"/>
-                </a:solidFill>
-                <a:latin typeface="Calibri" pitchFamily="34" charset="0"/>
-                <a:ea typeface="Calibri" pitchFamily="34" charset="-122"/>
-                <a:cs typeface="Calibri" pitchFamily="34" charset="-120"/>
-              </a:rPr>
-              <a:t>ANSWER  </a:t>
-            </a:r>
-            <a:pPr indent="0" marL="0">
-              <a:buNone/>
-            </a:pPr>
-            <a:r>
-              <a:rPr lang="en-US" sz="1500" b="1" dirty="0">
-                <a:solidFill>
-                  <a:srgbClr val="1B2A38"/>
-                </a:solidFill>
-                <a:latin typeface="Calibri" pitchFamily="34" charset="0"/>
-                <a:ea typeface="Calibri" pitchFamily="34" charset="-122"/>
-                <a:cs typeface="Calibri" pitchFamily="34" charset="-120"/>
-              </a:rPr>
-              <a:t>B — Quantified fetal-cell volume</a:t>
-            </a:r>
-            <a:endParaRPr lang="en-US" sz="1500" dirty="0"/>
-          </a:p>
-        </p:txBody>
-      </p:sp>
-      <p:sp>
-        <p:nvSpPr>
-          <p:cNvPr id="8" name="Text 6"/>
-          <p:cNvSpPr/>
-          <p:nvPr/>
-        </p:nvSpPr>
-        <p:spPr>
-          <a:xfrm>
-            <a:off x="7439376" y="3127248"/>
-            <a:ext cx="3947648" cy="2377440"/>
-          </a:xfrm>
-          <a:prstGeom prst="rect">
-            <a:avLst/>
-          </a:prstGeom>
-          <a:noFill/>
-          <a:ln/>
-        </p:spPr>
-        <p:txBody>
-          <a:bodyPr wrap="square" lIns="0" tIns="0" rIns="0" bIns="0" rtlCol="0" anchor="t"/>
-          <a:lstStyle/>
-          <a:p>
-            <a:pPr algn="l" indent="0" marL="0">
-              <a:lnSpc>
-                <a:spcPct val="108000"/>
-              </a:lnSpc>
-              <a:buNone/>
-            </a:pPr>
-            <a:r>
-              <a:rPr lang="en-US" sz="1250" dirty="0">
-                <a:solidFill>
-                  <a:srgbClr val="33444F"/>
-                </a:solidFill>
-                <a:latin typeface="Calibri" pitchFamily="34" charset="0"/>
-                <a:ea typeface="Calibri" pitchFamily="34" charset="-122"/>
-                <a:cs typeface="Calibri" pitchFamily="34" charset="-120"/>
-              </a:rPr>
-              <a:t>RhIG dose is based on the volume of fetomaternal hemorrhage, measured by Kleihauer-Betke or flow cytometry; large bleeds require additional vials beyond the standard dose.</a:t>
-            </a:r>
-            <a:endParaRPr lang="en-US" sz="1250" dirty="0"/>
           </a:p>
         </p:txBody>
       </p:sp>
@@ -11884,9 +11892,9 @@
               <a:buNone/>
             </a:pPr>
             <a:r>
-              <a:rPr lang="en-US" sz="1350" b="1" dirty="0">
-                <a:solidFill>
-                  <a:srgbClr val="7A0E3C"/>
+              <a:rPr lang="en-US" sz="1350" b="0" dirty="0">
+                <a:solidFill>
+                  <a:srgbClr val="33444F"/>
                 </a:solidFill>
                 <a:latin typeface="Calibri" pitchFamily="34" charset="0"/>
                 <a:ea typeface="Calibri" pitchFamily="34" charset="-122"/>
@@ -11935,130 +11943,6 @@
               <a:t>E. Fresh units only</a:t>
             </a:r>
             <a:endParaRPr lang="en-US" sz="1350" dirty="0"/>
-          </a:p>
-        </p:txBody>
-      </p:sp>
-      <p:sp>
-        <p:nvSpPr>
-          <p:cNvPr id="6" name="Shape 4"/>
-          <p:cNvSpPr/>
-          <p:nvPr/>
-        </p:nvSpPr>
-        <p:spPr>
-          <a:xfrm>
-            <a:off x="7201632" y="2395728"/>
-            <a:ext cx="4423136" cy="3246120"/>
-          </a:xfrm>
-          <a:prstGeom prst="roundRect">
-            <a:avLst>
-              <a:gd name="adj" fmla="val 2535"/>
-            </a:avLst>
-          </a:prstGeom>
-          <a:solidFill>
-            <a:srgbClr val="F8E7EF"/>
-          </a:solidFill>
-          <a:ln/>
-          <a:effectLst>
-            <a:outerShdw sx="100000" sy="100000" kx="0" ky="0" algn="bl" rotWithShape="0" blurRad="88900" dist="25400" dir="5400000">
-              <a:srgbClr val="22303C">
-                <a:alpha val="12000"/>
-              </a:srgbClr>
-            </a:outerShdw>
-          </a:effectLst>
-        </p:spPr>
-      </p:sp>
-      <p:sp>
-        <p:nvSpPr>
-          <p:cNvPr id="7" name="Text 5"/>
-          <p:cNvSpPr/>
-          <p:nvPr/>
-        </p:nvSpPr>
-        <p:spPr>
-          <a:xfrm>
-            <a:off x="7439376" y="2578608"/>
-            <a:ext cx="3965936" cy="457200"/>
-          </a:xfrm>
-          <a:prstGeom prst="rect">
-            <a:avLst/>
-          </a:prstGeom>
-          <a:noFill/>
-          <a:ln/>
-        </p:spPr>
-        <p:txBody>
-          <a:bodyPr wrap="square" lIns="0" tIns="0" rIns="0" bIns="0" rtlCol="0" anchor="ctr"/>
-          <a:lstStyle/>
-          <a:p>
-            <a:pPr indent="0" marL="0">
-              <a:buNone/>
-            </a:pPr>
-            <a:r>
-              <a:rPr lang="en-US" sz="1500" b="1" dirty="0">
-                <a:solidFill>
-                  <a:srgbClr val="AD1457"/>
-                </a:solidFill>
-                <a:latin typeface="Calibri" pitchFamily="34" charset="0"/>
-                <a:ea typeface="Calibri" pitchFamily="34" charset="-122"/>
-                <a:cs typeface="Calibri" pitchFamily="34" charset="-120"/>
-              </a:rPr>
-              <a:t>ANSWER  </a:t>
-            </a:r>
-            <a:pPr indent="0" marL="0">
-              <a:buNone/>
-            </a:pPr>
-            <a:r>
-              <a:rPr lang="en-US" sz="1500" b="1" dirty="0">
-                <a:solidFill>
-                  <a:srgbClr val="1B2A38"/>
-                </a:solidFill>
-                <a:latin typeface="Calibri" pitchFamily="34" charset="0"/>
-                <a:ea typeface="Calibri" pitchFamily="34" charset="-122"/>
-                <a:cs typeface="Calibri" pitchFamily="34" charset="-120"/>
-              </a:rPr>
-              <a:t>C — Irradiation</a:t>
-            </a:r>
-            <a:endParaRPr lang="en-US" sz="1500" dirty="0"/>
-          </a:p>
-        </p:txBody>
-      </p:sp>
-      <p:sp>
-        <p:nvSpPr>
-          <p:cNvPr id="8" name="Text 6"/>
-          <p:cNvSpPr/>
-          <p:nvPr/>
-        </p:nvSpPr>
-        <p:spPr>
-          <a:xfrm>
-            <a:off x="7439376" y="3127248"/>
-            <a:ext cx="3947648" cy="2377440"/>
-          </a:xfrm>
-          <a:prstGeom prst="rect">
-            <a:avLst/>
-          </a:prstGeom>
-          <a:noFill/>
-          <a:ln/>
-        </p:spPr>
-        <p:txBody>
-          <a:bodyPr wrap="square" lIns="0" tIns="0" rIns="0" bIns="0" rtlCol="0" anchor="t"/>
-          <a:lstStyle/>
-          <a:p>
-            <a:pPr algn="l" indent="0" marL="0">
-              <a:lnSpc>
-                <a:spcPct val="108000"/>
-              </a:lnSpc>
-              <a:buNone/>
-            </a:pPr>
-            <a:r>
-              <a:rPr lang="en-US" sz="1250" dirty="0">
-                <a:solidFill>
-                  <a:srgbClr val="33444F"/>
-                </a:solidFill>
-                <a:latin typeface="Calibri" pitchFamily="34" charset="0"/>
-                <a:ea typeface="Calibri" pitchFamily="34" charset="-122"/>
-                <a:cs typeface="Calibri" pitchFamily="34" charset="-120"/>
-              </a:rPr>
-              <a:t>Only irradiation reliably inactivates donor T-lymphocytes to prevent TA-GVHD. Leukoreduction reduces FNHTR/HLA alloimmunization/CMV risk but does not reliably prevent TA-GVHD.</a:t>
-            </a:r>
-            <a:endParaRPr lang="en-US" sz="1250" dirty="0"/>
           </a:p>
         </p:txBody>
       </p:sp>
@@ -12388,9 +12272,9 @@
               <a:buNone/>
             </a:pPr>
             <a:r>
-              <a:rPr lang="en-US" sz="1350" b="1" dirty="0">
-                <a:solidFill>
-                  <a:srgbClr val="7A0E3C"/>
+              <a:rPr lang="en-US" sz="1350" b="0" dirty="0">
+                <a:solidFill>
+                  <a:srgbClr val="33444F"/>
                 </a:solidFill>
                 <a:latin typeface="Calibri" pitchFamily="34" charset="0"/>
                 <a:ea typeface="Calibri" pitchFamily="34" charset="-122"/>
@@ -12439,130 +12323,6 @@
               <a:t>E. Cryoprecipitate</a:t>
             </a:r>
             <a:endParaRPr lang="en-US" sz="1350" dirty="0"/>
-          </a:p>
-        </p:txBody>
-      </p:sp>
-      <p:sp>
-        <p:nvSpPr>
-          <p:cNvPr id="6" name="Shape 4"/>
-          <p:cNvSpPr/>
-          <p:nvPr/>
-        </p:nvSpPr>
-        <p:spPr>
-          <a:xfrm>
-            <a:off x="7201632" y="2395728"/>
-            <a:ext cx="4423136" cy="3246120"/>
-          </a:xfrm>
-          <a:prstGeom prst="roundRect">
-            <a:avLst>
-              <a:gd name="adj" fmla="val 2535"/>
-            </a:avLst>
-          </a:prstGeom>
-          <a:solidFill>
-            <a:srgbClr val="F8E7EF"/>
-          </a:solidFill>
-          <a:ln/>
-          <a:effectLst>
-            <a:outerShdw sx="100000" sy="100000" kx="0" ky="0" algn="bl" rotWithShape="0" blurRad="88900" dist="25400" dir="5400000">
-              <a:srgbClr val="22303C">
-                <a:alpha val="12000"/>
-              </a:srgbClr>
-            </a:outerShdw>
-          </a:effectLst>
-        </p:spPr>
-      </p:sp>
-      <p:sp>
-        <p:nvSpPr>
-          <p:cNvPr id="7" name="Text 5"/>
-          <p:cNvSpPr/>
-          <p:nvPr/>
-        </p:nvSpPr>
-        <p:spPr>
-          <a:xfrm>
-            <a:off x="7439376" y="2578608"/>
-            <a:ext cx="3965936" cy="457200"/>
-          </a:xfrm>
-          <a:prstGeom prst="rect">
-            <a:avLst/>
-          </a:prstGeom>
-          <a:noFill/>
-          <a:ln/>
-        </p:spPr>
-        <p:txBody>
-          <a:bodyPr wrap="square" lIns="0" tIns="0" rIns="0" bIns="0" rtlCol="0" anchor="ctr"/>
-          <a:lstStyle/>
-          <a:p>
-            <a:pPr indent="0" marL="0">
-              <a:buNone/>
-            </a:pPr>
-            <a:r>
-              <a:rPr lang="en-US" sz="1500" b="1" dirty="0">
-                <a:solidFill>
-                  <a:srgbClr val="AD1457"/>
-                </a:solidFill>
-                <a:latin typeface="Calibri" pitchFamily="34" charset="0"/>
-                <a:ea typeface="Calibri" pitchFamily="34" charset="-122"/>
-                <a:cs typeface="Calibri" pitchFamily="34" charset="-120"/>
-              </a:rPr>
-              <a:t>ANSWER  </a:t>
-            </a:r>
-            <a:pPr indent="0" marL="0">
-              <a:buNone/>
-            </a:pPr>
-            <a:r>
-              <a:rPr lang="en-US" sz="1500" b="1" dirty="0">
-                <a:solidFill>
-                  <a:srgbClr val="1B2A38"/>
-                </a:solidFill>
-                <a:latin typeface="Calibri" pitchFamily="34" charset="0"/>
-                <a:ea typeface="Calibri" pitchFamily="34" charset="-122"/>
-                <a:cs typeface="Calibri" pitchFamily="34" charset="-120"/>
-              </a:rPr>
-              <a:t>C — Therapeutic plasma exchange</a:t>
-            </a:r>
-            <a:endParaRPr lang="en-US" sz="1500" dirty="0"/>
-          </a:p>
-        </p:txBody>
-      </p:sp>
-      <p:sp>
-        <p:nvSpPr>
-          <p:cNvPr id="8" name="Text 6"/>
-          <p:cNvSpPr/>
-          <p:nvPr/>
-        </p:nvSpPr>
-        <p:spPr>
-          <a:xfrm>
-            <a:off x="7439376" y="3127248"/>
-            <a:ext cx="3947648" cy="2377440"/>
-          </a:xfrm>
-          <a:prstGeom prst="rect">
-            <a:avLst/>
-          </a:prstGeom>
-          <a:noFill/>
-          <a:ln/>
-        </p:spPr>
-        <p:txBody>
-          <a:bodyPr wrap="square" lIns="0" tIns="0" rIns="0" bIns="0" rtlCol="0" anchor="t"/>
-          <a:lstStyle/>
-          <a:p>
-            <a:pPr algn="l" indent="0" marL="0">
-              <a:lnSpc>
-                <a:spcPct val="108000"/>
-              </a:lnSpc>
-              <a:buNone/>
-            </a:pPr>
-            <a:r>
-              <a:rPr lang="en-US" sz="1250" dirty="0">
-                <a:solidFill>
-                  <a:srgbClr val="33444F"/>
-                </a:solidFill>
-                <a:latin typeface="Calibri" pitchFamily="34" charset="0"/>
-                <a:ea typeface="Calibri" pitchFamily="34" charset="-122"/>
-                <a:cs typeface="Calibri" pitchFamily="34" charset="-120"/>
-              </a:rPr>
-              <a:t>TPE is first-line (ASFA category I) for TTP: it removes the ADAMTS13 inhibitor and ultra-large vWF multimers and replaces ADAMTS13. Platelets are generally avoided.</a:t>
-            </a:r>
-            <a:endParaRPr lang="en-US" sz="1250" dirty="0"/>
           </a:p>
         </p:txBody>
       </p:sp>
@@ -12872,9 +12632,9 @@
               <a:buNone/>
             </a:pPr>
             <a:r>
-              <a:rPr lang="en-US" sz="1350" b="1" dirty="0">
-                <a:solidFill>
-                  <a:srgbClr val="7A0E3C"/>
+              <a:rPr lang="en-US" sz="1350" b="0" dirty="0">
+                <a:solidFill>
+                  <a:srgbClr val="33444F"/>
                 </a:solidFill>
                 <a:latin typeface="Calibri" pitchFamily="34" charset="0"/>
                 <a:ea typeface="Calibri" pitchFamily="34" charset="-122"/>
@@ -12943,130 +12703,6 @@
               <a:t>E. Associated with suppressed erythropoiesis</a:t>
             </a:r>
             <a:endParaRPr lang="en-US" sz="1350" dirty="0"/>
-          </a:p>
-        </p:txBody>
-      </p:sp>
-      <p:sp>
-        <p:nvSpPr>
-          <p:cNvPr id="6" name="Shape 4"/>
-          <p:cNvSpPr/>
-          <p:nvPr/>
-        </p:nvSpPr>
-        <p:spPr>
-          <a:xfrm>
-            <a:off x="7201632" y="2395728"/>
-            <a:ext cx="4423136" cy="3246120"/>
-          </a:xfrm>
-          <a:prstGeom prst="roundRect">
-            <a:avLst>
-              <a:gd name="adj" fmla="val 2535"/>
-            </a:avLst>
-          </a:prstGeom>
-          <a:solidFill>
-            <a:srgbClr val="F8E7EF"/>
-          </a:solidFill>
-          <a:ln/>
-          <a:effectLst>
-            <a:outerShdw sx="100000" sy="100000" kx="0" ky="0" algn="bl" rotWithShape="0" blurRad="88900" dist="25400" dir="5400000">
-              <a:srgbClr val="22303C">
-                <a:alpha val="12000"/>
-              </a:srgbClr>
-            </a:outerShdw>
-          </a:effectLst>
-        </p:spPr>
-      </p:sp>
-      <p:sp>
-        <p:nvSpPr>
-          <p:cNvPr id="7" name="Text 5"/>
-          <p:cNvSpPr/>
-          <p:nvPr/>
-        </p:nvSpPr>
-        <p:spPr>
-          <a:xfrm>
-            <a:off x="7439376" y="2578608"/>
-            <a:ext cx="3965936" cy="457200"/>
-          </a:xfrm>
-          <a:prstGeom prst="rect">
-            <a:avLst/>
-          </a:prstGeom>
-          <a:noFill/>
-          <a:ln/>
-        </p:spPr>
-        <p:txBody>
-          <a:bodyPr wrap="square" lIns="0" tIns="0" rIns="0" bIns="0" rtlCol="0" anchor="ctr"/>
-          <a:lstStyle/>
-          <a:p>
-            <a:pPr indent="0" marL="0">
-              <a:buNone/>
-            </a:pPr>
-            <a:r>
-              <a:rPr lang="en-US" sz="1500" b="1" dirty="0">
-                <a:solidFill>
-                  <a:srgbClr val="AD1457"/>
-                </a:solidFill>
-                <a:latin typeface="Calibri" pitchFamily="34" charset="0"/>
-                <a:ea typeface="Calibri" pitchFamily="34" charset="-122"/>
-                <a:cs typeface="Calibri" pitchFamily="34" charset="-120"/>
-              </a:rPr>
-              <a:t>ANSWER  </a:t>
-            </a:r>
-            <a:pPr indent="0" marL="0">
-              <a:buNone/>
-            </a:pPr>
-            <a:r>
-              <a:rPr lang="en-US" sz="1500" b="1" dirty="0">
-                <a:solidFill>
-                  <a:srgbClr val="1B2A38"/>
-                </a:solidFill>
-                <a:latin typeface="Calibri" pitchFamily="34" charset="0"/>
-                <a:ea typeface="Calibri" pitchFamily="34" charset="-122"/>
-                <a:cs typeface="Calibri" pitchFamily="34" charset="-120"/>
-              </a:rPr>
-              <a:t>B — Usually mild; group O mother, A/B infant</a:t>
-            </a:r>
-            <a:endParaRPr lang="en-US" sz="1500" dirty="0"/>
-          </a:p>
-        </p:txBody>
-      </p:sp>
-      <p:sp>
-        <p:nvSpPr>
-          <p:cNvPr id="8" name="Text 6"/>
-          <p:cNvSpPr/>
-          <p:nvPr/>
-        </p:nvSpPr>
-        <p:spPr>
-          <a:xfrm>
-            <a:off x="7439376" y="3127248"/>
-            <a:ext cx="3947648" cy="2377440"/>
-          </a:xfrm>
-          <a:prstGeom prst="rect">
-            <a:avLst/>
-          </a:prstGeom>
-          <a:noFill/>
-          <a:ln/>
-        </p:spPr>
-        <p:txBody>
-          <a:bodyPr wrap="square" lIns="0" tIns="0" rIns="0" bIns="0" rtlCol="0" anchor="t"/>
-          <a:lstStyle/>
-          <a:p>
-            <a:pPr algn="l" indent="0" marL="0">
-              <a:lnSpc>
-                <a:spcPct val="108000"/>
-              </a:lnSpc>
-              <a:buNone/>
-            </a:pPr>
-            <a:r>
-              <a:rPr lang="en-US" sz="1250" dirty="0">
-                <a:solidFill>
-                  <a:srgbClr val="33444F"/>
-                </a:solidFill>
-                <a:latin typeface="Calibri" pitchFamily="34" charset="0"/>
-                <a:ea typeface="Calibri" pitchFamily="34" charset="-122"/>
-                <a:cs typeface="Calibri" pitchFamily="34" charset="-120"/>
-              </a:rPr>
-              <a:t>ABO HDN is generally mild because fetal A/B antigens are weakly expressed and IgG anti-A,B is variable. Anti-Kell (not ABO) suppresses erythropoiesis; RhIG prevents anti-D, not ABO, disease.</a:t>
-            </a:r>
-            <a:endParaRPr lang="en-US" sz="1250" dirty="0"/>
           </a:p>
         </p:txBody>
       </p:sp>
@@ -13307,6 +12943,10 @@
           </a:solidFill>
           <a:ln/>
         </p:spPr>
+        <p:txBody>
+          <a:bodyPr/>
+          <a:p/>
+        </p:txBody>
       </p:sp>
       <p:sp>
         <p:nvSpPr>
@@ -13334,6 +12974,10 @@
             </a:outerShdw>
           </a:effectLst>
         </p:spPr>
+        <p:txBody>
+          <a:bodyPr/>
+          <a:p/>
+        </p:txBody>
       </p:sp>
       <p:sp>
         <p:nvSpPr>
@@ -13434,6 +13078,10 @@
           </a:solidFill>
           <a:ln/>
         </p:spPr>
+        <p:txBody>
+          <a:bodyPr/>
+          <a:p/>
+        </p:txBody>
       </p:sp>
       <p:sp>
         <p:nvSpPr>
@@ -13461,6 +13109,10 @@
             </a:outerShdw>
           </a:effectLst>
         </p:spPr>
+        <p:txBody>
+          <a:bodyPr/>
+          <a:p/>
+        </p:txBody>
       </p:sp>
       <p:sp>
         <p:nvSpPr>
@@ -13561,6 +13213,10 @@
           </a:solidFill>
           <a:ln/>
         </p:spPr>
+        <p:txBody>
+          <a:bodyPr/>
+          <a:p/>
+        </p:txBody>
       </p:sp>
       <p:sp>
         <p:nvSpPr>
@@ -13588,6 +13244,10 @@
             </a:outerShdw>
           </a:effectLst>
         </p:spPr>
+        <p:txBody>
+          <a:bodyPr/>
+          <a:p/>
+        </p:txBody>
       </p:sp>
       <p:sp>
         <p:nvSpPr>
@@ -13688,6 +13348,10 @@
           </a:solidFill>
           <a:ln/>
         </p:spPr>
+        <p:txBody>
+          <a:bodyPr/>
+          <a:p/>
+        </p:txBody>
       </p:sp>
       <p:sp>
         <p:nvSpPr>
@@ -13715,6 +13379,10 @@
             </a:outerShdw>
           </a:effectLst>
         </p:spPr>
+        <p:txBody>
+          <a:bodyPr/>
+          <a:p/>
+        </p:txBody>
       </p:sp>
       <p:sp>
         <p:nvSpPr>
@@ -13815,6 +13483,10 @@
           </a:solidFill>
           <a:ln/>
         </p:spPr>
+        <p:txBody>
+          <a:bodyPr/>
+          <a:p/>
+        </p:txBody>
       </p:sp>
       <p:sp>
         <p:nvSpPr>
@@ -13842,6 +13514,10 @@
             </a:outerShdw>
           </a:effectLst>
         </p:spPr>
+        <p:txBody>
+          <a:bodyPr/>
+          <a:p/>
+        </p:txBody>
       </p:sp>
       <p:sp>
         <p:nvSpPr>
@@ -14137,6 +13813,10 @@
             </a:outerShdw>
           </a:effectLst>
         </p:spPr>
+        <p:txBody>
+          <a:bodyPr/>
+          <a:p/>
+        </p:txBody>
       </p:sp>
       <p:sp>
         <p:nvSpPr>
@@ -14164,6 +13844,10 @@
             </a:outerShdw>
           </a:effectLst>
         </p:spPr>
+        <p:txBody>
+          <a:bodyPr/>
+          <a:p/>
+        </p:txBody>
       </p:sp>
       <p:sp>
         <p:nvSpPr>
@@ -14271,6 +13955,10 @@
             </a:outerShdw>
           </a:effectLst>
         </p:spPr>
+        <p:txBody>
+          <a:bodyPr/>
+          <a:p/>
+        </p:txBody>
       </p:sp>
       <p:sp>
         <p:nvSpPr>
@@ -14298,6 +13986,10 @@
             </a:outerShdw>
           </a:effectLst>
         </p:spPr>
+        <p:txBody>
+          <a:bodyPr/>
+          <a:p/>
+        </p:txBody>
       </p:sp>
       <p:sp>
         <p:nvSpPr>
@@ -14405,6 +14097,10 @@
             </a:outerShdw>
           </a:effectLst>
         </p:spPr>
+        <p:txBody>
+          <a:bodyPr/>
+          <a:p/>
+        </p:txBody>
       </p:sp>
       <p:sp>
         <p:nvSpPr>
@@ -14432,6 +14128,10 @@
             </a:outerShdw>
           </a:effectLst>
         </p:spPr>
+        <p:txBody>
+          <a:bodyPr/>
+          <a:p/>
+        </p:txBody>
       </p:sp>
       <p:sp>
         <p:nvSpPr>
@@ -14539,6 +14239,10 @@
             </a:outerShdw>
           </a:effectLst>
         </p:spPr>
+        <p:txBody>
+          <a:bodyPr/>
+          <a:p/>
+        </p:txBody>
       </p:sp>
       <p:sp>
         <p:nvSpPr>
@@ -14566,6 +14270,10 @@
             </a:outerShdw>
           </a:effectLst>
         </p:spPr>
+        <p:txBody>
+          <a:bodyPr/>
+          <a:p/>
+        </p:txBody>
       </p:sp>
       <p:sp>
         <p:nvSpPr>
@@ -14673,6 +14381,10 @@
             </a:outerShdw>
           </a:effectLst>
         </p:spPr>
+        <p:txBody>
+          <a:bodyPr/>
+          <a:p/>
+        </p:txBody>
       </p:sp>
       <p:sp>
         <p:nvSpPr>
@@ -14700,6 +14412,10 @@
             </a:outerShdw>
           </a:effectLst>
         </p:spPr>
+        <p:txBody>
+          <a:bodyPr/>
+          <a:p/>
+        </p:txBody>
       </p:sp>
       <p:sp>
         <p:nvSpPr>
@@ -14807,6 +14523,10 @@
             </a:outerShdw>
           </a:effectLst>
         </p:spPr>
+        <p:txBody>
+          <a:bodyPr/>
+          <a:p/>
+        </p:txBody>
       </p:sp>
       <p:sp>
         <p:nvSpPr>
@@ -14834,6 +14554,10 @@
             </a:outerShdw>
           </a:effectLst>
         </p:spPr>
+        <p:txBody>
+          <a:bodyPr/>
+          <a:p/>
+        </p:txBody>
       </p:sp>
       <p:sp>
         <p:nvSpPr>
@@ -15345,6 +15069,1982 @@
 </p:sld>
 </file>
 
+<file path=ppt/slides/slide31.xml><?xml version="1.0" encoding="utf-8"?>
+<p:sld xmlns:a="http://schemas.openxmlformats.org/drawingml/2006/main" xmlns:p="http://schemas.openxmlformats.org/presentationml/2006/main" xmlns:r="http://schemas.openxmlformats.org/officeDocument/2006/relationships">
+  <p:cSld>
+    <p:spTree>
+      <p:nvGrpSpPr>
+        <p:cNvPr id="1" name=""/>
+        <p:cNvGrpSpPr/>
+        <p:nvPr/>
+      </p:nvGrpSpPr>
+      <p:grpSpPr/>
+      <p:sp>
+        <p:nvSpPr>
+          <p:cNvPr id="2" name="Text 0"/>
+          <p:cNvSpPr/>
+          <p:nvPr/>
+        </p:nvSpPr>
+        <p:spPr>
+          <a:xfrm>
+            <a:off x="566928" y="329184"/>
+            <a:ext cx="10515600" cy="310896"/>
+          </a:xfrm>
+          <a:prstGeom prst="rect">
+            <a:avLst/>
+          </a:prstGeom>
+          <a:noFill/>
+          <a:ln/>
+        </p:spPr>
+        <p:txBody>
+          <a:bodyPr wrap="square" lIns="0" tIns="0" rIns="0" bIns="0" rtlCol="0" anchor="ctr"/>
+          <a:lstStyle/>
+          <a:p>
+            <a:pPr algn="l" indent="0" marL="0">
+              <a:buNone/>
+            </a:pPr>
+            <a:r>
+              <a:rPr lang="en-US" sz="1100" b="1" spc="150" kern="0" dirty="0">
+                <a:solidFill>
+                  <a:srgbClr val="AD1457"/>
+                </a:solidFill>
+                <a:latin typeface="Calibri" pitchFamily="34" charset="0"/>
+                <a:ea typeface="Calibri" pitchFamily="34" charset="-122"/>
+                <a:cs typeface="Calibri" pitchFamily="34" charset="-120"/>
+              </a:rPr>
+              <a:t>TRANSFUSION MEDICINE   ·   BOARD REVIEW  ·  Q4</a:t>
+            </a:r>
+            <a:endParaRPr lang="en-US" sz="1100" dirty="0"/>
+          </a:p>
+        </p:txBody>
+      </p:sp>
+      <p:sp>
+        <p:nvSpPr>
+          <p:cNvPr id="3" name="Text 1"/>
+          <p:cNvSpPr/>
+          <p:nvPr/>
+        </p:nvSpPr>
+        <p:spPr>
+          <a:xfrm>
+            <a:off x="566928" y="713232"/>
+            <a:ext cx="11064240" cy="749808"/>
+          </a:xfrm>
+          <a:prstGeom prst="rect">
+            <a:avLst/>
+          </a:prstGeom>
+          <a:noFill/>
+          <a:ln/>
+        </p:spPr>
+        <p:txBody>
+          <a:bodyPr wrap="square" lIns="0" tIns="0" rIns="0" bIns="0" rtlCol="0" anchor="ctr"/>
+          <a:lstStyle/>
+          <a:p>
+            <a:pPr algn="l" indent="0" marL="0">
+              <a:buNone/>
+            </a:pPr>
+            <a:r>
+              <a:rPr lang="en-US" sz="2600" b="1" dirty="0">
+                <a:solidFill>
+                  <a:srgbClr val="0E3A5F"/>
+                </a:solidFill>
+                <a:latin typeface="Calibri" pitchFamily="34" charset="0"/>
+                <a:ea typeface="Calibri" pitchFamily="34" charset="-122"/>
+                <a:cs typeface="Calibri" pitchFamily="34" charset="-120"/>
+              </a:rPr>
+              <a:t>Board-Style Review</a:t>
+            </a:r>
+            <a:endParaRPr lang="en-US" sz="2600" dirty="0"/>
+          </a:p>
+        </p:txBody>
+      </p:sp>
+      <p:sp>
+        <p:nvSpPr>
+          <p:cNvPr id="4" name="Text 2"/>
+          <p:cNvSpPr/>
+          <p:nvPr/>
+        </p:nvSpPr>
+        <p:spPr>
+          <a:xfrm>
+            <a:off x="566928" y="1417320"/>
+            <a:ext cx="11057839" cy="914400"/>
+          </a:xfrm>
+          <a:prstGeom prst="rect">
+            <a:avLst/>
+          </a:prstGeom>
+          <a:noFill/>
+          <a:ln/>
+        </p:spPr>
+        <p:txBody>
+          <a:bodyPr wrap="square" lIns="0" tIns="0" rIns="0" bIns="0" rtlCol="0" anchor="t"/>
+          <a:lstStyle/>
+          <a:p>
+            <a:pPr algn="l" indent="0" marL="0">
+              <a:lnSpc>
+                <a:spcPct val="105000"/>
+              </a:lnSpc>
+              <a:buNone/>
+            </a:pPr>
+            <a:r>
+              <a:rPr lang="en-US" sz="1450" b="1" dirty="0">
+                <a:solidFill>
+                  <a:srgbClr val="1B2A38"/>
+                </a:solidFill>
+                <a:latin typeface="Calibri" pitchFamily="34" charset="0"/>
+                <a:ea typeface="Calibri" pitchFamily="34" charset="-122"/>
+                <a:cs typeface="Calibri" pitchFamily="34" charset="-120"/>
+              </a:rPr>
+              <a:t>Compared with anti-D HDFN, ABO hemolytic disease of the newborn is typically:</a:t>
+            </a:r>
+            <a:endParaRPr lang="en-US" sz="1450" dirty="0"/>
+          </a:p>
+        </p:txBody>
+      </p:sp>
+      <p:sp>
+        <p:nvSpPr>
+          <p:cNvPr id="5" name="Text 3"/>
+          <p:cNvSpPr/>
+          <p:nvPr/>
+        </p:nvSpPr>
+        <p:spPr>
+          <a:xfrm>
+            <a:off x="658368" y="2395728"/>
+            <a:ext cx="6192390" cy="3017520"/>
+          </a:xfrm>
+          <a:prstGeom prst="rect">
+            <a:avLst/>
+          </a:prstGeom>
+          <a:noFill/>
+          <a:ln/>
+        </p:spPr>
+        <p:txBody>
+          <a:bodyPr wrap="square" lIns="0" tIns="0" rIns="0" bIns="0" rtlCol="0" anchor="t"/>
+          <a:lstStyle/>
+          <a:p>
+            <a:pPr algn="l" indent="0" marL="0">
+              <a:spcAft>
+                <a:spcPts val="600"/>
+              </a:spcAft>
+              <a:buNone/>
+            </a:pPr>
+            <a:r>
+              <a:rPr lang="en-US" sz="1350" dirty="0">
+                <a:solidFill>
+                  <a:srgbClr val="33444F"/>
+                </a:solidFill>
+                <a:latin typeface="Calibri" pitchFamily="34" charset="0"/>
+                <a:ea typeface="Calibri" pitchFamily="34" charset="-122"/>
+                <a:cs typeface="Calibri" pitchFamily="34" charset="-120"/>
+              </a:rPr>
+              <a:t>A. More severe and requires intrauterine transfusion</a:t>
+            </a:r>
+            <a:endParaRPr lang="en-US" sz="1350" dirty="0"/>
+          </a:p>
+          <a:p>
+            <a:pPr algn="l" indent="0" marL="0">
+              <a:spcAft>
+                <a:spcPts val="600"/>
+              </a:spcAft>
+              <a:buNone/>
+            </a:pPr>
+            <a:r>
+              <a:rPr lang="en-US" sz="1350" b="1" dirty="0">
+                <a:solidFill>
+                  <a:srgbClr val="7A0E3C"/>
+                </a:solidFill>
+                <a:latin typeface="Calibri" pitchFamily="34" charset="0"/>
+                <a:ea typeface="Calibri" pitchFamily="34" charset="-122"/>
+                <a:cs typeface="Calibri" pitchFamily="34" charset="-120"/>
+              </a:rPr>
+              <a:t>B. Usually mild, occurring in group O mothers with group A or B infants</a:t>
+            </a:r>
+            <a:endParaRPr lang="en-US" sz="1350" dirty="0"/>
+          </a:p>
+          <a:p>
+            <a:pPr algn="l" indent="0" marL="0">
+              <a:spcAft>
+                <a:spcPts val="600"/>
+              </a:spcAft>
+              <a:buNone/>
+            </a:pPr>
+            <a:r>
+              <a:rPr lang="en-US" sz="1350" dirty="0">
+                <a:solidFill>
+                  <a:srgbClr val="33444F"/>
+                </a:solidFill>
+                <a:latin typeface="Calibri" pitchFamily="34" charset="0"/>
+                <a:ea typeface="Calibri" pitchFamily="34" charset="-122"/>
+                <a:cs typeface="Calibri" pitchFamily="34" charset="-120"/>
+              </a:rPr>
+              <a:t>C. Caused by IgM antibodies crossing the placenta</a:t>
+            </a:r>
+            <a:endParaRPr lang="en-US" sz="1350" dirty="0"/>
+          </a:p>
+          <a:p>
+            <a:pPr algn="l" indent="0" marL="0">
+              <a:spcAft>
+                <a:spcPts val="600"/>
+              </a:spcAft>
+              <a:buNone/>
+            </a:pPr>
+            <a:r>
+              <a:rPr lang="en-US" sz="1350" dirty="0">
+                <a:solidFill>
+                  <a:srgbClr val="33444F"/>
+                </a:solidFill>
+                <a:latin typeface="Calibri" pitchFamily="34" charset="0"/>
+                <a:ea typeface="Calibri" pitchFamily="34" charset="-122"/>
+                <a:cs typeface="Calibri" pitchFamily="34" charset="-120"/>
+              </a:rPr>
+              <a:t>D. Prevented by RhIG</a:t>
+            </a:r>
+            <a:endParaRPr lang="en-US" sz="1350" dirty="0"/>
+          </a:p>
+          <a:p>
+            <a:pPr algn="l" indent="0" marL="0">
+              <a:spcAft>
+                <a:spcPts val="600"/>
+              </a:spcAft>
+              <a:buNone/>
+            </a:pPr>
+            <a:r>
+              <a:rPr lang="en-US" sz="1350" dirty="0">
+                <a:solidFill>
+                  <a:srgbClr val="33444F"/>
+                </a:solidFill>
+                <a:latin typeface="Calibri" pitchFamily="34" charset="0"/>
+                <a:ea typeface="Calibri" pitchFamily="34" charset="-122"/>
+                <a:cs typeface="Calibri" pitchFamily="34" charset="-120"/>
+              </a:rPr>
+              <a:t>E. Associated with suppressed erythropoiesis</a:t>
+            </a:r>
+            <a:endParaRPr lang="en-US" sz="1350" dirty="0"/>
+          </a:p>
+        </p:txBody>
+      </p:sp>
+      <p:sp>
+        <p:nvSpPr>
+          <p:cNvPr id="6" name="Shape 4"/>
+          <p:cNvSpPr/>
+          <p:nvPr/>
+        </p:nvSpPr>
+        <p:spPr>
+          <a:xfrm>
+            <a:off x="7201632" y="2395728"/>
+            <a:ext cx="4423136" cy="3246120"/>
+          </a:xfrm>
+          <a:prstGeom prst="roundRect">
+            <a:avLst>
+              <a:gd name="adj" fmla="val 2535"/>
+            </a:avLst>
+          </a:prstGeom>
+          <a:solidFill>
+            <a:srgbClr val="F8E7EF"/>
+          </a:solidFill>
+          <a:ln/>
+          <a:effectLst>
+            <a:outerShdw sx="100000" sy="100000" kx="0" ky="0" algn="bl" rotWithShape="0" blurRad="88900" dist="25400" dir="5400000">
+              <a:srgbClr val="22303C">
+                <a:alpha val="12000"/>
+              </a:srgbClr>
+            </a:outerShdw>
+          </a:effectLst>
+        </p:spPr>
+        <p:txBody>
+          <a:bodyPr/>
+          <a:p/>
+        </p:txBody>
+      </p:sp>
+      <p:sp>
+        <p:nvSpPr>
+          <p:cNvPr id="7" name="Text 5"/>
+          <p:cNvSpPr/>
+          <p:nvPr/>
+        </p:nvSpPr>
+        <p:spPr>
+          <a:xfrm>
+            <a:off x="7439376" y="2578608"/>
+            <a:ext cx="3965936" cy="457200"/>
+          </a:xfrm>
+          <a:prstGeom prst="rect">
+            <a:avLst/>
+          </a:prstGeom>
+          <a:noFill/>
+          <a:ln/>
+        </p:spPr>
+        <p:txBody>
+          <a:bodyPr wrap="square" lIns="0" tIns="0" rIns="0" bIns="0" rtlCol="0" anchor="ctr"/>
+          <a:lstStyle/>
+          <a:p>
+            <a:pPr indent="0" marL="0">
+              <a:buNone/>
+            </a:pPr>
+            <a:r>
+              <a:rPr lang="en-US" sz="1500" b="1" dirty="0">
+                <a:solidFill>
+                  <a:srgbClr val="AD1457"/>
+                </a:solidFill>
+                <a:latin typeface="Calibri" pitchFamily="34" charset="0"/>
+                <a:ea typeface="Calibri" pitchFamily="34" charset="-122"/>
+                <a:cs typeface="Calibri" pitchFamily="34" charset="-120"/>
+              </a:rPr>
+              <a:t>ANSWER  </a:t>
+            </a:r>
+            <a:pPr indent="0" marL="0">
+              <a:buNone/>
+            </a:pPr>
+            <a:r>
+              <a:rPr lang="en-US" sz="1500" b="1" dirty="0">
+                <a:solidFill>
+                  <a:srgbClr val="1B2A38"/>
+                </a:solidFill>
+                <a:latin typeface="Calibri" pitchFamily="34" charset="0"/>
+                <a:ea typeface="Calibri" pitchFamily="34" charset="-122"/>
+                <a:cs typeface="Calibri" pitchFamily="34" charset="-120"/>
+              </a:rPr>
+              <a:t>B — Usually mild; group O mother, A/B infant</a:t>
+            </a:r>
+            <a:endParaRPr lang="en-US" sz="1500" dirty="0"/>
+          </a:p>
+        </p:txBody>
+      </p:sp>
+      <p:sp>
+        <p:nvSpPr>
+          <p:cNvPr id="8" name="Text 6"/>
+          <p:cNvSpPr/>
+          <p:nvPr/>
+        </p:nvSpPr>
+        <p:spPr>
+          <a:xfrm>
+            <a:off x="7439376" y="3127248"/>
+            <a:ext cx="3947648" cy="2377440"/>
+          </a:xfrm>
+          <a:prstGeom prst="rect">
+            <a:avLst/>
+          </a:prstGeom>
+          <a:noFill/>
+          <a:ln/>
+        </p:spPr>
+        <p:txBody>
+          <a:bodyPr wrap="square" lIns="0" tIns="0" rIns="0" bIns="0" rtlCol="0" anchor="t"/>
+          <a:lstStyle/>
+          <a:p>
+            <a:pPr algn="l" indent="0" marL="0">
+              <a:lnSpc>
+                <a:spcPct val="108000"/>
+              </a:lnSpc>
+              <a:buNone/>
+            </a:pPr>
+            <a:r>
+              <a:rPr lang="en-US" sz="1250" dirty="0">
+                <a:solidFill>
+                  <a:srgbClr val="33444F"/>
+                </a:solidFill>
+                <a:latin typeface="Calibri" pitchFamily="34" charset="0"/>
+                <a:ea typeface="Calibri" pitchFamily="34" charset="-122"/>
+                <a:cs typeface="Calibri" pitchFamily="34" charset="-120"/>
+              </a:rPr>
+              <a:t>ABO HDN is generally mild because fetal A/B antigens are weakly expressed and IgG anti-A,B is variable. Anti-Kell (not ABO) suppresses erythropoiesis; RhIG prevents anti-D, not ABO, disease.</a:t>
+            </a:r>
+            <a:endParaRPr lang="en-US" sz="1250" dirty="0"/>
+          </a:p>
+        </p:txBody>
+      </p:sp>
+      <p:sp>
+        <p:nvSpPr>
+          <p:cNvPr id="9" name="Text 7"/>
+          <p:cNvSpPr/>
+          <p:nvPr/>
+        </p:nvSpPr>
+        <p:spPr>
+          <a:xfrm>
+            <a:off x="566928" y="6473952"/>
+            <a:ext cx="7772400" cy="274320"/>
+          </a:xfrm>
+          <a:prstGeom prst="rect">
+            <a:avLst/>
+          </a:prstGeom>
+          <a:noFill/>
+          <a:ln/>
+        </p:spPr>
+        <p:txBody>
+          <a:bodyPr wrap="square" lIns="0" tIns="0" rIns="0" bIns="0" rtlCol="0" anchor="ctr"/>
+          <a:lstStyle/>
+          <a:p>
+            <a:pPr algn="l" indent="0" marL="0">
+              <a:buNone/>
+            </a:pPr>
+            <a:r>
+              <a:rPr lang="en-US" sz="850" dirty="0">
+                <a:solidFill>
+                  <a:srgbClr val="9AA8B4"/>
+                </a:solidFill>
+                <a:latin typeface="Calibri" pitchFamily="34" charset="0"/>
+                <a:ea typeface="Calibri" pitchFamily="34" charset="-122"/>
+                <a:cs typeface="Calibri" pitchFamily="34" charset="-120"/>
+              </a:rPr>
+              <a:t>Makassed General Hospital  ·  Department of Laboratory Medicine</a:t>
+            </a:r>
+            <a:endParaRPr lang="en-US" sz="850" dirty="0"/>
+          </a:p>
+        </p:txBody>
+      </p:sp>
+      <p:sp>
+        <p:nvSpPr>
+          <p:cNvPr id="10" name="Text 8"/>
+          <p:cNvSpPr/>
+          <p:nvPr/>
+        </p:nvSpPr>
+        <p:spPr>
+          <a:xfrm>
+            <a:off x="9814255" y="6473952"/>
+            <a:ext cx="1828800" cy="274320"/>
+          </a:xfrm>
+          <a:prstGeom prst="rect">
+            <a:avLst/>
+          </a:prstGeom>
+          <a:noFill/>
+          <a:ln/>
+        </p:spPr>
+        <p:txBody>
+          <a:bodyPr wrap="square" lIns="0" tIns="0" rIns="0" bIns="0" rtlCol="0" anchor="ctr"/>
+          <a:lstStyle/>
+          <a:p>
+            <a:pPr algn="r" indent="0" marL="0">
+              <a:buNone/>
+            </a:pPr>
+            <a:r>
+              <a:rPr lang="en-US" sz="850" dirty="0">
+                <a:solidFill>
+                  <a:srgbClr val="9AA8B4"/>
+                </a:solidFill>
+                <a:latin typeface="Calibri" pitchFamily="34" charset="0"/>
+                <a:ea typeface="Calibri" pitchFamily="34" charset="-122"/>
+                <a:cs typeface="Calibri" pitchFamily="34" charset="-120"/>
+              </a:rPr>
+              <a:t>CP Lecture Series</a:t>
+            </a:r>
+            <a:pPr algn="r" indent="0" marL="0">
+              <a:buNone/>
+            </a:pPr>
+            <a:r>
+              <a:rPr lang="en-US" sz="850" dirty="0">
+                <a:solidFill>
+                  <a:srgbClr val="DCE4EC"/>
+                </a:solidFill>
+                <a:latin typeface="Calibri" pitchFamily="34" charset="0"/>
+                <a:ea typeface="Calibri" pitchFamily="34" charset="-122"/>
+                <a:cs typeface="Calibri" pitchFamily="34" charset="-120"/>
+              </a:rPr>
+              <a:t>   ·   </a:t>
+            </a:r>
+            <a:pPr algn="r" indent="0" marL="0">
+              <a:buNone/>
+            </a:pPr>
+            <a:r>
+              <a:rPr lang="en-US" sz="850" b="1" dirty="0">
+                <a:solidFill>
+                  <a:srgbClr val="AD1457"/>
+                </a:solidFill>
+                <a:latin typeface="Calibri" pitchFamily="34" charset="0"/>
+                <a:ea typeface="Calibri" pitchFamily="34" charset="-122"/>
+                <a:cs typeface="Calibri" pitchFamily="34" charset="-120"/>
+              </a:rPr>
+              <a:t>23</a:t>
+            </a:r>
+            <a:endParaRPr lang="en-US" sz="850" dirty="0"/>
+          </a:p>
+        </p:txBody>
+      </p:sp>
+    </p:spTree>
+  </p:cSld>
+  <p:clrMapOvr>
+    <a:masterClrMapping/>
+  </p:clrMapOvr>
+</p:sld>
+</file>
+
+<file path=ppt/slides/slide32.xml><?xml version="1.0" encoding="utf-8"?>
+<p:sld xmlns:a="http://schemas.openxmlformats.org/drawingml/2006/main" xmlns:p="http://schemas.openxmlformats.org/presentationml/2006/main" xmlns:r="http://schemas.openxmlformats.org/officeDocument/2006/relationships">
+  <p:cSld>
+    <p:spTree>
+      <p:nvGrpSpPr>
+        <p:cNvPr id="1" name=""/>
+        <p:cNvGrpSpPr/>
+        <p:nvPr/>
+      </p:nvGrpSpPr>
+      <p:grpSpPr/>
+      <p:sp>
+        <p:nvSpPr>
+          <p:cNvPr id="2" name="Text 0"/>
+          <p:cNvSpPr/>
+          <p:nvPr/>
+        </p:nvSpPr>
+        <p:spPr>
+          <a:xfrm>
+            <a:off x="566928" y="329184"/>
+            <a:ext cx="10515600" cy="310896"/>
+          </a:xfrm>
+          <a:prstGeom prst="rect">
+            <a:avLst/>
+          </a:prstGeom>
+          <a:noFill/>
+          <a:ln/>
+        </p:spPr>
+        <p:txBody>
+          <a:bodyPr wrap="square" lIns="0" tIns="0" rIns="0" bIns="0" rtlCol="0" anchor="ctr"/>
+          <a:lstStyle/>
+          <a:p>
+            <a:pPr algn="l" indent="0" marL="0">
+              <a:buNone/>
+            </a:pPr>
+            <a:r>
+              <a:rPr lang="en-US" sz="1100" b="1" spc="150" kern="0" dirty="0">
+                <a:solidFill>
+                  <a:srgbClr val="AD1457"/>
+                </a:solidFill>
+                <a:latin typeface="Calibri" pitchFamily="34" charset="0"/>
+                <a:ea typeface="Calibri" pitchFamily="34" charset="-122"/>
+                <a:cs typeface="Calibri" pitchFamily="34" charset="-120"/>
+              </a:rPr>
+              <a:t>TRANSFUSION MEDICINE   ·   BOARD REVIEW  ·  Q3</a:t>
+            </a:r>
+            <a:endParaRPr lang="en-US" sz="1100" dirty="0"/>
+          </a:p>
+        </p:txBody>
+      </p:sp>
+      <p:sp>
+        <p:nvSpPr>
+          <p:cNvPr id="3" name="Text 1"/>
+          <p:cNvSpPr/>
+          <p:nvPr/>
+        </p:nvSpPr>
+        <p:spPr>
+          <a:xfrm>
+            <a:off x="566928" y="713232"/>
+            <a:ext cx="11064240" cy="749808"/>
+          </a:xfrm>
+          <a:prstGeom prst="rect">
+            <a:avLst/>
+          </a:prstGeom>
+          <a:noFill/>
+          <a:ln/>
+        </p:spPr>
+        <p:txBody>
+          <a:bodyPr wrap="square" lIns="0" tIns="0" rIns="0" bIns="0" rtlCol="0" anchor="ctr"/>
+          <a:lstStyle/>
+          <a:p>
+            <a:pPr algn="l" indent="0" marL="0">
+              <a:buNone/>
+            </a:pPr>
+            <a:r>
+              <a:rPr lang="en-US" sz="2600" b="1" dirty="0">
+                <a:solidFill>
+                  <a:srgbClr val="0E3A5F"/>
+                </a:solidFill>
+                <a:latin typeface="Calibri" pitchFamily="34" charset="0"/>
+                <a:ea typeface="Calibri" pitchFamily="34" charset="-122"/>
+                <a:cs typeface="Calibri" pitchFamily="34" charset="-120"/>
+              </a:rPr>
+              <a:t>Board-Style Review</a:t>
+            </a:r>
+            <a:endParaRPr lang="en-US" sz="2600" dirty="0"/>
+          </a:p>
+        </p:txBody>
+      </p:sp>
+      <p:sp>
+        <p:nvSpPr>
+          <p:cNvPr id="4" name="Text 2"/>
+          <p:cNvSpPr/>
+          <p:nvPr/>
+        </p:nvSpPr>
+        <p:spPr>
+          <a:xfrm>
+            <a:off x="566928" y="1417320"/>
+            <a:ext cx="11057839" cy="914400"/>
+          </a:xfrm>
+          <a:prstGeom prst="rect">
+            <a:avLst/>
+          </a:prstGeom>
+          <a:noFill/>
+          <a:ln/>
+        </p:spPr>
+        <p:txBody>
+          <a:bodyPr wrap="square" lIns="0" tIns="0" rIns="0" bIns="0" rtlCol="0" anchor="t"/>
+          <a:lstStyle/>
+          <a:p>
+            <a:pPr algn="l" indent="0" marL="0">
+              <a:lnSpc>
+                <a:spcPct val="105000"/>
+              </a:lnSpc>
+              <a:buNone/>
+            </a:pPr>
+            <a:r>
+              <a:rPr lang="en-US" sz="1450" b="1" dirty="0">
+                <a:solidFill>
+                  <a:srgbClr val="1B2A38"/>
+                </a:solidFill>
+                <a:latin typeface="Calibri" pitchFamily="34" charset="0"/>
+                <a:ea typeface="Calibri" pitchFamily="34" charset="-122"/>
+                <a:cs typeface="Calibri" pitchFamily="34" charset="-120"/>
+              </a:rPr>
+              <a:t>A patient with TTP and severe ADAMTS13 deficiency needs definitive treatment. Which is first-line?</a:t>
+            </a:r>
+            <a:endParaRPr lang="en-US" sz="1450" dirty="0"/>
+          </a:p>
+        </p:txBody>
+      </p:sp>
+      <p:sp>
+        <p:nvSpPr>
+          <p:cNvPr id="5" name="Text 3"/>
+          <p:cNvSpPr/>
+          <p:nvPr/>
+        </p:nvSpPr>
+        <p:spPr>
+          <a:xfrm>
+            <a:off x="658368" y="2395728"/>
+            <a:ext cx="6192390" cy="3017520"/>
+          </a:xfrm>
+          <a:prstGeom prst="rect">
+            <a:avLst/>
+          </a:prstGeom>
+          <a:noFill/>
+          <a:ln/>
+        </p:spPr>
+        <p:txBody>
+          <a:bodyPr wrap="square" lIns="0" tIns="0" rIns="0" bIns="0" rtlCol="0" anchor="t"/>
+          <a:lstStyle/>
+          <a:p>
+            <a:pPr algn="l" indent="0" marL="0">
+              <a:spcAft>
+                <a:spcPts val="600"/>
+              </a:spcAft>
+              <a:buNone/>
+            </a:pPr>
+            <a:r>
+              <a:rPr lang="en-US" sz="1350" dirty="0">
+                <a:solidFill>
+                  <a:srgbClr val="33444F"/>
+                </a:solidFill>
+                <a:latin typeface="Calibri" pitchFamily="34" charset="0"/>
+                <a:ea typeface="Calibri" pitchFamily="34" charset="-122"/>
+                <a:cs typeface="Calibri" pitchFamily="34" charset="-120"/>
+              </a:rPr>
+              <a:t>A. Platelet transfusion</a:t>
+            </a:r>
+            <a:endParaRPr lang="en-US" sz="1350" dirty="0"/>
+          </a:p>
+          <a:p>
+            <a:pPr algn="l" indent="0" marL="0">
+              <a:spcAft>
+                <a:spcPts val="600"/>
+              </a:spcAft>
+              <a:buNone/>
+            </a:pPr>
+            <a:r>
+              <a:rPr lang="en-US" sz="1350" dirty="0">
+                <a:solidFill>
+                  <a:srgbClr val="33444F"/>
+                </a:solidFill>
+                <a:latin typeface="Calibri" pitchFamily="34" charset="0"/>
+                <a:ea typeface="Calibri" pitchFamily="34" charset="-122"/>
+                <a:cs typeface="Calibri" pitchFamily="34" charset="-120"/>
+              </a:rPr>
+              <a:t>B. Red cell exchange</a:t>
+            </a:r>
+            <a:endParaRPr lang="en-US" sz="1350" dirty="0"/>
+          </a:p>
+          <a:p>
+            <a:pPr algn="l" indent="0" marL="0">
+              <a:spcAft>
+                <a:spcPts val="600"/>
+              </a:spcAft>
+              <a:buNone/>
+            </a:pPr>
+            <a:r>
+              <a:rPr lang="en-US" sz="1350" b="1" dirty="0">
+                <a:solidFill>
+                  <a:srgbClr val="7A0E3C"/>
+                </a:solidFill>
+                <a:latin typeface="Calibri" pitchFamily="34" charset="0"/>
+                <a:ea typeface="Calibri" pitchFamily="34" charset="-122"/>
+                <a:cs typeface="Calibri" pitchFamily="34" charset="-120"/>
+              </a:rPr>
+              <a:t>C. Therapeutic plasma exchange</a:t>
+            </a:r>
+            <a:endParaRPr lang="en-US" sz="1350" dirty="0"/>
+          </a:p>
+          <a:p>
+            <a:pPr algn="l" indent="0" marL="0">
+              <a:spcAft>
+                <a:spcPts val="600"/>
+              </a:spcAft>
+              <a:buNone/>
+            </a:pPr>
+            <a:r>
+              <a:rPr lang="en-US" sz="1350" dirty="0">
+                <a:solidFill>
+                  <a:srgbClr val="33444F"/>
+                </a:solidFill>
+                <a:latin typeface="Calibri" pitchFamily="34" charset="0"/>
+                <a:ea typeface="Calibri" pitchFamily="34" charset="-122"/>
+                <a:cs typeface="Calibri" pitchFamily="34" charset="-120"/>
+              </a:rPr>
+              <a:t>D. Leukapheresis</a:t>
+            </a:r>
+            <a:endParaRPr lang="en-US" sz="1350" dirty="0"/>
+          </a:p>
+          <a:p>
+            <a:pPr algn="l" indent="0" marL="0">
+              <a:spcAft>
+                <a:spcPts val="600"/>
+              </a:spcAft>
+              <a:buNone/>
+            </a:pPr>
+            <a:r>
+              <a:rPr lang="en-US" sz="1350" dirty="0">
+                <a:solidFill>
+                  <a:srgbClr val="33444F"/>
+                </a:solidFill>
+                <a:latin typeface="Calibri" pitchFamily="34" charset="0"/>
+                <a:ea typeface="Calibri" pitchFamily="34" charset="-122"/>
+                <a:cs typeface="Calibri" pitchFamily="34" charset="-120"/>
+              </a:rPr>
+              <a:t>E. Cryoprecipitate</a:t>
+            </a:r>
+            <a:endParaRPr lang="en-US" sz="1350" dirty="0"/>
+          </a:p>
+        </p:txBody>
+      </p:sp>
+      <p:sp>
+        <p:nvSpPr>
+          <p:cNvPr id="6" name="Shape 4"/>
+          <p:cNvSpPr/>
+          <p:nvPr/>
+        </p:nvSpPr>
+        <p:spPr>
+          <a:xfrm>
+            <a:off x="7201632" y="2395728"/>
+            <a:ext cx="4423136" cy="3246120"/>
+          </a:xfrm>
+          <a:prstGeom prst="roundRect">
+            <a:avLst>
+              <a:gd name="adj" fmla="val 2535"/>
+            </a:avLst>
+          </a:prstGeom>
+          <a:solidFill>
+            <a:srgbClr val="F8E7EF"/>
+          </a:solidFill>
+          <a:ln/>
+          <a:effectLst>
+            <a:outerShdw sx="100000" sy="100000" kx="0" ky="0" algn="bl" rotWithShape="0" blurRad="88900" dist="25400" dir="5400000">
+              <a:srgbClr val="22303C">
+                <a:alpha val="12000"/>
+              </a:srgbClr>
+            </a:outerShdw>
+          </a:effectLst>
+        </p:spPr>
+        <p:txBody>
+          <a:bodyPr/>
+          <a:p/>
+        </p:txBody>
+      </p:sp>
+      <p:sp>
+        <p:nvSpPr>
+          <p:cNvPr id="7" name="Text 5"/>
+          <p:cNvSpPr/>
+          <p:nvPr/>
+        </p:nvSpPr>
+        <p:spPr>
+          <a:xfrm>
+            <a:off x="7439376" y="2578608"/>
+            <a:ext cx="3965936" cy="457200"/>
+          </a:xfrm>
+          <a:prstGeom prst="rect">
+            <a:avLst/>
+          </a:prstGeom>
+          <a:noFill/>
+          <a:ln/>
+        </p:spPr>
+        <p:txBody>
+          <a:bodyPr wrap="square" lIns="0" tIns="0" rIns="0" bIns="0" rtlCol="0" anchor="ctr"/>
+          <a:lstStyle/>
+          <a:p>
+            <a:pPr indent="0" marL="0">
+              <a:buNone/>
+            </a:pPr>
+            <a:r>
+              <a:rPr lang="en-US" sz="1500" b="1" dirty="0">
+                <a:solidFill>
+                  <a:srgbClr val="AD1457"/>
+                </a:solidFill>
+                <a:latin typeface="Calibri" pitchFamily="34" charset="0"/>
+                <a:ea typeface="Calibri" pitchFamily="34" charset="-122"/>
+                <a:cs typeface="Calibri" pitchFamily="34" charset="-120"/>
+              </a:rPr>
+              <a:t>ANSWER  </a:t>
+            </a:r>
+            <a:pPr indent="0" marL="0">
+              <a:buNone/>
+            </a:pPr>
+            <a:r>
+              <a:rPr lang="en-US" sz="1500" b="1" dirty="0">
+                <a:solidFill>
+                  <a:srgbClr val="1B2A38"/>
+                </a:solidFill>
+                <a:latin typeface="Calibri" pitchFamily="34" charset="0"/>
+                <a:ea typeface="Calibri" pitchFamily="34" charset="-122"/>
+                <a:cs typeface="Calibri" pitchFamily="34" charset="-120"/>
+              </a:rPr>
+              <a:t>C — Therapeutic plasma exchange</a:t>
+            </a:r>
+            <a:endParaRPr lang="en-US" sz="1500" dirty="0"/>
+          </a:p>
+        </p:txBody>
+      </p:sp>
+      <p:sp>
+        <p:nvSpPr>
+          <p:cNvPr id="8" name="Text 6"/>
+          <p:cNvSpPr/>
+          <p:nvPr/>
+        </p:nvSpPr>
+        <p:spPr>
+          <a:xfrm>
+            <a:off x="7439376" y="3127248"/>
+            <a:ext cx="3947648" cy="2377440"/>
+          </a:xfrm>
+          <a:prstGeom prst="rect">
+            <a:avLst/>
+          </a:prstGeom>
+          <a:noFill/>
+          <a:ln/>
+        </p:spPr>
+        <p:txBody>
+          <a:bodyPr wrap="square" lIns="0" tIns="0" rIns="0" bIns="0" rtlCol="0" anchor="t"/>
+          <a:lstStyle/>
+          <a:p>
+            <a:pPr algn="l" indent="0" marL="0">
+              <a:lnSpc>
+                <a:spcPct val="108000"/>
+              </a:lnSpc>
+              <a:buNone/>
+            </a:pPr>
+            <a:r>
+              <a:rPr lang="en-US" sz="1250" dirty="0">
+                <a:solidFill>
+                  <a:srgbClr val="33444F"/>
+                </a:solidFill>
+                <a:latin typeface="Calibri" pitchFamily="34" charset="0"/>
+                <a:ea typeface="Calibri" pitchFamily="34" charset="-122"/>
+                <a:cs typeface="Calibri" pitchFamily="34" charset="-120"/>
+              </a:rPr>
+              <a:t>TPE is first-line (ASFA category I) for TTP: it removes the ADAMTS13 inhibitor and ultra-large vWF multimers and replaces ADAMTS13. Platelets are generally avoided.</a:t>
+            </a:r>
+            <a:endParaRPr lang="en-US" sz="1250" dirty="0"/>
+          </a:p>
+        </p:txBody>
+      </p:sp>
+      <p:sp>
+        <p:nvSpPr>
+          <p:cNvPr id="9" name="Text 7"/>
+          <p:cNvSpPr/>
+          <p:nvPr/>
+        </p:nvSpPr>
+        <p:spPr>
+          <a:xfrm>
+            <a:off x="566928" y="6473952"/>
+            <a:ext cx="7772400" cy="274320"/>
+          </a:xfrm>
+          <a:prstGeom prst="rect">
+            <a:avLst/>
+          </a:prstGeom>
+          <a:noFill/>
+          <a:ln/>
+        </p:spPr>
+        <p:txBody>
+          <a:bodyPr wrap="square" lIns="0" tIns="0" rIns="0" bIns="0" rtlCol="0" anchor="ctr"/>
+          <a:lstStyle/>
+          <a:p>
+            <a:pPr algn="l" indent="0" marL="0">
+              <a:buNone/>
+            </a:pPr>
+            <a:r>
+              <a:rPr lang="en-US" sz="850" dirty="0">
+                <a:solidFill>
+                  <a:srgbClr val="9AA8B4"/>
+                </a:solidFill>
+                <a:latin typeface="Calibri" pitchFamily="34" charset="0"/>
+                <a:ea typeface="Calibri" pitchFamily="34" charset="-122"/>
+                <a:cs typeface="Calibri" pitchFamily="34" charset="-120"/>
+              </a:rPr>
+              <a:t>Makassed General Hospital  ·  Department of Laboratory Medicine</a:t>
+            </a:r>
+            <a:endParaRPr lang="en-US" sz="850" dirty="0"/>
+          </a:p>
+        </p:txBody>
+      </p:sp>
+      <p:sp>
+        <p:nvSpPr>
+          <p:cNvPr id="10" name="Text 8"/>
+          <p:cNvSpPr/>
+          <p:nvPr/>
+        </p:nvSpPr>
+        <p:spPr>
+          <a:xfrm>
+            <a:off x="9814255" y="6473952"/>
+            <a:ext cx="1828800" cy="274320"/>
+          </a:xfrm>
+          <a:prstGeom prst="rect">
+            <a:avLst/>
+          </a:prstGeom>
+          <a:noFill/>
+          <a:ln/>
+        </p:spPr>
+        <p:txBody>
+          <a:bodyPr wrap="square" lIns="0" tIns="0" rIns="0" bIns="0" rtlCol="0" anchor="ctr"/>
+          <a:lstStyle/>
+          <a:p>
+            <a:pPr algn="r" indent="0" marL="0">
+              <a:buNone/>
+            </a:pPr>
+            <a:r>
+              <a:rPr lang="en-US" sz="850" dirty="0">
+                <a:solidFill>
+                  <a:srgbClr val="9AA8B4"/>
+                </a:solidFill>
+                <a:latin typeface="Calibri" pitchFamily="34" charset="0"/>
+                <a:ea typeface="Calibri" pitchFamily="34" charset="-122"/>
+                <a:cs typeface="Calibri" pitchFamily="34" charset="-120"/>
+              </a:rPr>
+              <a:t>CP Lecture Series</a:t>
+            </a:r>
+            <a:pPr algn="r" indent="0" marL="0">
+              <a:buNone/>
+            </a:pPr>
+            <a:r>
+              <a:rPr lang="en-US" sz="850" dirty="0">
+                <a:solidFill>
+                  <a:srgbClr val="DCE4EC"/>
+                </a:solidFill>
+                <a:latin typeface="Calibri" pitchFamily="34" charset="0"/>
+                <a:ea typeface="Calibri" pitchFamily="34" charset="-122"/>
+                <a:cs typeface="Calibri" pitchFamily="34" charset="-120"/>
+              </a:rPr>
+              <a:t>   ·   </a:t>
+            </a:r>
+            <a:pPr algn="r" indent="0" marL="0">
+              <a:buNone/>
+            </a:pPr>
+            <a:r>
+              <a:rPr lang="en-US" sz="850" b="1" dirty="0">
+                <a:solidFill>
+                  <a:srgbClr val="AD1457"/>
+                </a:solidFill>
+                <a:latin typeface="Calibri" pitchFamily="34" charset="0"/>
+                <a:ea typeface="Calibri" pitchFamily="34" charset="-122"/>
+                <a:cs typeface="Calibri" pitchFamily="34" charset="-120"/>
+              </a:rPr>
+              <a:t>22</a:t>
+            </a:r>
+            <a:endParaRPr lang="en-US" sz="850" dirty="0"/>
+          </a:p>
+        </p:txBody>
+      </p:sp>
+    </p:spTree>
+  </p:cSld>
+  <p:clrMapOvr>
+    <a:masterClrMapping/>
+  </p:clrMapOvr>
+</p:sld>
+</file>
+
+<file path=ppt/slides/slide33.xml><?xml version="1.0" encoding="utf-8"?>
+<p:sld xmlns:a="http://schemas.openxmlformats.org/drawingml/2006/main" xmlns:p="http://schemas.openxmlformats.org/presentationml/2006/main" xmlns:r="http://schemas.openxmlformats.org/officeDocument/2006/relationships">
+  <p:cSld>
+    <p:spTree>
+      <p:nvGrpSpPr>
+        <p:cNvPr id="1" name=""/>
+        <p:cNvGrpSpPr/>
+        <p:nvPr/>
+      </p:nvGrpSpPr>
+      <p:grpSpPr/>
+      <p:sp>
+        <p:nvSpPr>
+          <p:cNvPr id="2" name="Text 0"/>
+          <p:cNvSpPr/>
+          <p:nvPr/>
+        </p:nvSpPr>
+        <p:spPr>
+          <a:xfrm>
+            <a:off x="566928" y="329184"/>
+            <a:ext cx="10515600" cy="310896"/>
+          </a:xfrm>
+          <a:prstGeom prst="rect">
+            <a:avLst/>
+          </a:prstGeom>
+          <a:noFill/>
+          <a:ln/>
+        </p:spPr>
+        <p:txBody>
+          <a:bodyPr wrap="square" lIns="0" tIns="0" rIns="0" bIns="0" rtlCol="0" anchor="ctr"/>
+          <a:lstStyle/>
+          <a:p>
+            <a:pPr algn="l" indent="0" marL="0">
+              <a:buNone/>
+            </a:pPr>
+            <a:r>
+              <a:rPr lang="en-US" sz="1100" b="1" spc="150" kern="0" dirty="0">
+                <a:solidFill>
+                  <a:srgbClr val="AD1457"/>
+                </a:solidFill>
+                <a:latin typeface="Calibri" pitchFamily="34" charset="0"/>
+                <a:ea typeface="Calibri" pitchFamily="34" charset="-122"/>
+                <a:cs typeface="Calibri" pitchFamily="34" charset="-120"/>
+              </a:rPr>
+              <a:t>TRANSFUSION MEDICINE   ·   BOARD REVIEW  ·  Q2</a:t>
+            </a:r>
+            <a:endParaRPr lang="en-US" sz="1100" dirty="0"/>
+          </a:p>
+        </p:txBody>
+      </p:sp>
+      <p:sp>
+        <p:nvSpPr>
+          <p:cNvPr id="3" name="Text 1"/>
+          <p:cNvSpPr/>
+          <p:nvPr/>
+        </p:nvSpPr>
+        <p:spPr>
+          <a:xfrm>
+            <a:off x="566928" y="713232"/>
+            <a:ext cx="11064240" cy="749808"/>
+          </a:xfrm>
+          <a:prstGeom prst="rect">
+            <a:avLst/>
+          </a:prstGeom>
+          <a:noFill/>
+          <a:ln/>
+        </p:spPr>
+        <p:txBody>
+          <a:bodyPr wrap="square" lIns="0" tIns="0" rIns="0" bIns="0" rtlCol="0" anchor="ctr"/>
+          <a:lstStyle/>
+          <a:p>
+            <a:pPr algn="l" indent="0" marL="0">
+              <a:buNone/>
+            </a:pPr>
+            <a:r>
+              <a:rPr lang="en-US" sz="2600" b="1" dirty="0">
+                <a:solidFill>
+                  <a:srgbClr val="0E3A5F"/>
+                </a:solidFill>
+                <a:latin typeface="Calibri" pitchFamily="34" charset="0"/>
+                <a:ea typeface="Calibri" pitchFamily="34" charset="-122"/>
+                <a:cs typeface="Calibri" pitchFamily="34" charset="-120"/>
+              </a:rPr>
+              <a:t>Board-Style Review</a:t>
+            </a:r>
+            <a:endParaRPr lang="en-US" sz="2600" dirty="0"/>
+          </a:p>
+        </p:txBody>
+      </p:sp>
+      <p:sp>
+        <p:nvSpPr>
+          <p:cNvPr id="4" name="Text 2"/>
+          <p:cNvSpPr/>
+          <p:nvPr/>
+        </p:nvSpPr>
+        <p:spPr>
+          <a:xfrm>
+            <a:off x="566928" y="1417320"/>
+            <a:ext cx="11057839" cy="914400"/>
+          </a:xfrm>
+          <a:prstGeom prst="rect">
+            <a:avLst/>
+          </a:prstGeom>
+          <a:noFill/>
+          <a:ln/>
+        </p:spPr>
+        <p:txBody>
+          <a:bodyPr wrap="square" lIns="0" tIns="0" rIns="0" bIns="0" rtlCol="0" anchor="t"/>
+          <a:lstStyle/>
+          <a:p>
+            <a:pPr algn="l" indent="0" marL="0">
+              <a:lnSpc>
+                <a:spcPct val="105000"/>
+              </a:lnSpc>
+              <a:buNone/>
+            </a:pPr>
+            <a:r>
+              <a:rPr lang="en-US" sz="1450" b="1" dirty="0">
+                <a:solidFill>
+                  <a:srgbClr val="1B2A38"/>
+                </a:solidFill>
+                <a:latin typeface="Calibri" pitchFamily="34" charset="0"/>
+                <a:ea typeface="Calibri" pitchFamily="34" charset="-122"/>
+                <a:cs typeface="Calibri" pitchFamily="34" charset="-120"/>
+              </a:rPr>
+              <a:t>Which modification is required to prevent transfusion-associated graft-versus-host disease in an at-risk recipient?</a:t>
+            </a:r>
+            <a:endParaRPr lang="en-US" sz="1450" dirty="0"/>
+          </a:p>
+        </p:txBody>
+      </p:sp>
+      <p:sp>
+        <p:nvSpPr>
+          <p:cNvPr id="5" name="Text 3"/>
+          <p:cNvSpPr/>
+          <p:nvPr/>
+        </p:nvSpPr>
+        <p:spPr>
+          <a:xfrm>
+            <a:off x="658368" y="2395728"/>
+            <a:ext cx="6192390" cy="3017520"/>
+          </a:xfrm>
+          <a:prstGeom prst="rect">
+            <a:avLst/>
+          </a:prstGeom>
+          <a:noFill/>
+          <a:ln/>
+        </p:spPr>
+        <p:txBody>
+          <a:bodyPr wrap="square" lIns="0" tIns="0" rIns="0" bIns="0" rtlCol="0" anchor="t"/>
+          <a:lstStyle/>
+          <a:p>
+            <a:pPr algn="l" indent="0" marL="0">
+              <a:spcAft>
+                <a:spcPts val="600"/>
+              </a:spcAft>
+              <a:buNone/>
+            </a:pPr>
+            <a:r>
+              <a:rPr lang="en-US" sz="1350" dirty="0">
+                <a:solidFill>
+                  <a:srgbClr val="33444F"/>
+                </a:solidFill>
+                <a:latin typeface="Calibri" pitchFamily="34" charset="0"/>
+                <a:ea typeface="Calibri" pitchFamily="34" charset="-122"/>
+                <a:cs typeface="Calibri" pitchFamily="34" charset="-120"/>
+              </a:rPr>
+              <a:t>A. Leukoreduction</a:t>
+            </a:r>
+            <a:endParaRPr lang="en-US" sz="1350" dirty="0"/>
+          </a:p>
+          <a:p>
+            <a:pPr algn="l" indent="0" marL="0">
+              <a:spcAft>
+                <a:spcPts val="600"/>
+              </a:spcAft>
+              <a:buNone/>
+            </a:pPr>
+            <a:r>
+              <a:rPr lang="en-US" sz="1350" dirty="0">
+                <a:solidFill>
+                  <a:srgbClr val="33444F"/>
+                </a:solidFill>
+                <a:latin typeface="Calibri" pitchFamily="34" charset="0"/>
+                <a:ea typeface="Calibri" pitchFamily="34" charset="-122"/>
+                <a:cs typeface="Calibri" pitchFamily="34" charset="-120"/>
+              </a:rPr>
+              <a:t>B. Washing</a:t>
+            </a:r>
+            <a:endParaRPr lang="en-US" sz="1350" dirty="0"/>
+          </a:p>
+          <a:p>
+            <a:pPr algn="l" indent="0" marL="0">
+              <a:spcAft>
+                <a:spcPts val="600"/>
+              </a:spcAft>
+              <a:buNone/>
+            </a:pPr>
+            <a:r>
+              <a:rPr lang="en-US" sz="1350" b="1" dirty="0">
+                <a:solidFill>
+                  <a:srgbClr val="7A0E3C"/>
+                </a:solidFill>
+                <a:latin typeface="Calibri" pitchFamily="34" charset="0"/>
+                <a:ea typeface="Calibri" pitchFamily="34" charset="-122"/>
+                <a:cs typeface="Calibri" pitchFamily="34" charset="-120"/>
+              </a:rPr>
+              <a:t>C. Irradiation of cellular components</a:t>
+            </a:r>
+            <a:endParaRPr lang="en-US" sz="1350" dirty="0"/>
+          </a:p>
+          <a:p>
+            <a:pPr algn="l" indent="0" marL="0">
+              <a:spcAft>
+                <a:spcPts val="600"/>
+              </a:spcAft>
+              <a:buNone/>
+            </a:pPr>
+            <a:r>
+              <a:rPr lang="en-US" sz="1350" dirty="0">
+                <a:solidFill>
+                  <a:srgbClr val="33444F"/>
+                </a:solidFill>
+                <a:latin typeface="Calibri" pitchFamily="34" charset="0"/>
+                <a:ea typeface="Calibri" pitchFamily="34" charset="-122"/>
+                <a:cs typeface="Calibri" pitchFamily="34" charset="-120"/>
+              </a:rPr>
+              <a:t>D. CMV-seronegative units</a:t>
+            </a:r>
+            <a:endParaRPr lang="en-US" sz="1350" dirty="0"/>
+          </a:p>
+          <a:p>
+            <a:pPr algn="l" indent="0" marL="0">
+              <a:spcAft>
+                <a:spcPts val="600"/>
+              </a:spcAft>
+              <a:buNone/>
+            </a:pPr>
+            <a:r>
+              <a:rPr lang="en-US" sz="1350" dirty="0">
+                <a:solidFill>
+                  <a:srgbClr val="33444F"/>
+                </a:solidFill>
+                <a:latin typeface="Calibri" pitchFamily="34" charset="0"/>
+                <a:ea typeface="Calibri" pitchFamily="34" charset="-122"/>
+                <a:cs typeface="Calibri" pitchFamily="34" charset="-120"/>
+              </a:rPr>
+              <a:t>E. Fresh units only</a:t>
+            </a:r>
+            <a:endParaRPr lang="en-US" sz="1350" dirty="0"/>
+          </a:p>
+        </p:txBody>
+      </p:sp>
+      <p:sp>
+        <p:nvSpPr>
+          <p:cNvPr id="6" name="Shape 4"/>
+          <p:cNvSpPr/>
+          <p:nvPr/>
+        </p:nvSpPr>
+        <p:spPr>
+          <a:xfrm>
+            <a:off x="7201632" y="2395728"/>
+            <a:ext cx="4423136" cy="3246120"/>
+          </a:xfrm>
+          <a:prstGeom prst="roundRect">
+            <a:avLst>
+              <a:gd name="adj" fmla="val 2535"/>
+            </a:avLst>
+          </a:prstGeom>
+          <a:solidFill>
+            <a:srgbClr val="F8E7EF"/>
+          </a:solidFill>
+          <a:ln/>
+          <a:effectLst>
+            <a:outerShdw sx="100000" sy="100000" kx="0" ky="0" algn="bl" rotWithShape="0" blurRad="88900" dist="25400" dir="5400000">
+              <a:srgbClr val="22303C">
+                <a:alpha val="12000"/>
+              </a:srgbClr>
+            </a:outerShdw>
+          </a:effectLst>
+        </p:spPr>
+        <p:txBody>
+          <a:bodyPr/>
+          <a:p/>
+        </p:txBody>
+      </p:sp>
+      <p:sp>
+        <p:nvSpPr>
+          <p:cNvPr id="7" name="Text 5"/>
+          <p:cNvSpPr/>
+          <p:nvPr/>
+        </p:nvSpPr>
+        <p:spPr>
+          <a:xfrm>
+            <a:off x="7439376" y="2578608"/>
+            <a:ext cx="3965936" cy="457200"/>
+          </a:xfrm>
+          <a:prstGeom prst="rect">
+            <a:avLst/>
+          </a:prstGeom>
+          <a:noFill/>
+          <a:ln/>
+        </p:spPr>
+        <p:txBody>
+          <a:bodyPr wrap="square" lIns="0" tIns="0" rIns="0" bIns="0" rtlCol="0" anchor="ctr"/>
+          <a:lstStyle/>
+          <a:p>
+            <a:pPr indent="0" marL="0">
+              <a:buNone/>
+            </a:pPr>
+            <a:r>
+              <a:rPr lang="en-US" sz="1500" b="1" dirty="0">
+                <a:solidFill>
+                  <a:srgbClr val="AD1457"/>
+                </a:solidFill>
+                <a:latin typeface="Calibri" pitchFamily="34" charset="0"/>
+                <a:ea typeface="Calibri" pitchFamily="34" charset="-122"/>
+                <a:cs typeface="Calibri" pitchFamily="34" charset="-120"/>
+              </a:rPr>
+              <a:t>ANSWER  </a:t>
+            </a:r>
+            <a:pPr indent="0" marL="0">
+              <a:buNone/>
+            </a:pPr>
+            <a:r>
+              <a:rPr lang="en-US" sz="1500" b="1" dirty="0">
+                <a:solidFill>
+                  <a:srgbClr val="1B2A38"/>
+                </a:solidFill>
+                <a:latin typeface="Calibri" pitchFamily="34" charset="0"/>
+                <a:ea typeface="Calibri" pitchFamily="34" charset="-122"/>
+                <a:cs typeface="Calibri" pitchFamily="34" charset="-120"/>
+              </a:rPr>
+              <a:t>C — Irradiation</a:t>
+            </a:r>
+            <a:endParaRPr lang="en-US" sz="1500" dirty="0"/>
+          </a:p>
+        </p:txBody>
+      </p:sp>
+      <p:sp>
+        <p:nvSpPr>
+          <p:cNvPr id="8" name="Text 6"/>
+          <p:cNvSpPr/>
+          <p:nvPr/>
+        </p:nvSpPr>
+        <p:spPr>
+          <a:xfrm>
+            <a:off x="7439376" y="3127248"/>
+            <a:ext cx="3947648" cy="2377440"/>
+          </a:xfrm>
+          <a:prstGeom prst="rect">
+            <a:avLst/>
+          </a:prstGeom>
+          <a:noFill/>
+          <a:ln/>
+        </p:spPr>
+        <p:txBody>
+          <a:bodyPr wrap="square" lIns="0" tIns="0" rIns="0" bIns="0" rtlCol="0" anchor="t"/>
+          <a:lstStyle/>
+          <a:p>
+            <a:pPr algn="l" indent="0" marL="0">
+              <a:lnSpc>
+                <a:spcPct val="108000"/>
+              </a:lnSpc>
+              <a:buNone/>
+            </a:pPr>
+            <a:r>
+              <a:rPr lang="en-US" sz="1250" dirty="0">
+                <a:solidFill>
+                  <a:srgbClr val="33444F"/>
+                </a:solidFill>
+                <a:latin typeface="Calibri" pitchFamily="34" charset="0"/>
+                <a:ea typeface="Calibri" pitchFamily="34" charset="-122"/>
+                <a:cs typeface="Calibri" pitchFamily="34" charset="-120"/>
+              </a:rPr>
+              <a:t>Only irradiation reliably inactivates donor T-lymphocytes to prevent TA-GVHD. Leukoreduction reduces FNHTR/HLA alloimmunization/CMV risk but does not reliably prevent TA-GVHD.</a:t>
+            </a:r>
+            <a:endParaRPr lang="en-US" sz="1250" dirty="0"/>
+          </a:p>
+        </p:txBody>
+      </p:sp>
+      <p:sp>
+        <p:nvSpPr>
+          <p:cNvPr id="9" name="Text 7"/>
+          <p:cNvSpPr/>
+          <p:nvPr/>
+        </p:nvSpPr>
+        <p:spPr>
+          <a:xfrm>
+            <a:off x="566928" y="6473952"/>
+            <a:ext cx="7772400" cy="274320"/>
+          </a:xfrm>
+          <a:prstGeom prst="rect">
+            <a:avLst/>
+          </a:prstGeom>
+          <a:noFill/>
+          <a:ln/>
+        </p:spPr>
+        <p:txBody>
+          <a:bodyPr wrap="square" lIns="0" tIns="0" rIns="0" bIns="0" rtlCol="0" anchor="ctr"/>
+          <a:lstStyle/>
+          <a:p>
+            <a:pPr algn="l" indent="0" marL="0">
+              <a:buNone/>
+            </a:pPr>
+            <a:r>
+              <a:rPr lang="en-US" sz="850" dirty="0">
+                <a:solidFill>
+                  <a:srgbClr val="9AA8B4"/>
+                </a:solidFill>
+                <a:latin typeface="Calibri" pitchFamily="34" charset="0"/>
+                <a:ea typeface="Calibri" pitchFamily="34" charset="-122"/>
+                <a:cs typeface="Calibri" pitchFamily="34" charset="-120"/>
+              </a:rPr>
+              <a:t>Makassed General Hospital  ·  Department of Laboratory Medicine</a:t>
+            </a:r>
+            <a:endParaRPr lang="en-US" sz="850" dirty="0"/>
+          </a:p>
+        </p:txBody>
+      </p:sp>
+      <p:sp>
+        <p:nvSpPr>
+          <p:cNvPr id="10" name="Text 8"/>
+          <p:cNvSpPr/>
+          <p:nvPr/>
+        </p:nvSpPr>
+        <p:spPr>
+          <a:xfrm>
+            <a:off x="9814255" y="6473952"/>
+            <a:ext cx="1828800" cy="274320"/>
+          </a:xfrm>
+          <a:prstGeom prst="rect">
+            <a:avLst/>
+          </a:prstGeom>
+          <a:noFill/>
+          <a:ln/>
+        </p:spPr>
+        <p:txBody>
+          <a:bodyPr wrap="square" lIns="0" tIns="0" rIns="0" bIns="0" rtlCol="0" anchor="ctr"/>
+          <a:lstStyle/>
+          <a:p>
+            <a:pPr algn="r" indent="0" marL="0">
+              <a:buNone/>
+            </a:pPr>
+            <a:r>
+              <a:rPr lang="en-US" sz="850" dirty="0">
+                <a:solidFill>
+                  <a:srgbClr val="9AA8B4"/>
+                </a:solidFill>
+                <a:latin typeface="Calibri" pitchFamily="34" charset="0"/>
+                <a:ea typeface="Calibri" pitchFamily="34" charset="-122"/>
+                <a:cs typeface="Calibri" pitchFamily="34" charset="-120"/>
+              </a:rPr>
+              <a:t>CP Lecture Series</a:t>
+            </a:r>
+            <a:pPr algn="r" indent="0" marL="0">
+              <a:buNone/>
+            </a:pPr>
+            <a:r>
+              <a:rPr lang="en-US" sz="850" dirty="0">
+                <a:solidFill>
+                  <a:srgbClr val="DCE4EC"/>
+                </a:solidFill>
+                <a:latin typeface="Calibri" pitchFamily="34" charset="0"/>
+                <a:ea typeface="Calibri" pitchFamily="34" charset="-122"/>
+                <a:cs typeface="Calibri" pitchFamily="34" charset="-120"/>
+              </a:rPr>
+              <a:t>   ·   </a:t>
+            </a:r>
+            <a:pPr algn="r" indent="0" marL="0">
+              <a:buNone/>
+            </a:pPr>
+            <a:r>
+              <a:rPr lang="en-US" sz="850" b="1" dirty="0">
+                <a:solidFill>
+                  <a:srgbClr val="AD1457"/>
+                </a:solidFill>
+                <a:latin typeface="Calibri" pitchFamily="34" charset="0"/>
+                <a:ea typeface="Calibri" pitchFamily="34" charset="-122"/>
+                <a:cs typeface="Calibri" pitchFamily="34" charset="-120"/>
+              </a:rPr>
+              <a:t>21</a:t>
+            </a:r>
+            <a:endParaRPr lang="en-US" sz="850" dirty="0"/>
+          </a:p>
+        </p:txBody>
+      </p:sp>
+    </p:spTree>
+  </p:cSld>
+  <p:clrMapOvr>
+    <a:masterClrMapping/>
+  </p:clrMapOvr>
+</p:sld>
+</file>
+
+<file path=ppt/slides/slide34.xml><?xml version="1.0" encoding="utf-8"?>
+<p:sld xmlns:a="http://schemas.openxmlformats.org/drawingml/2006/main" xmlns:p="http://schemas.openxmlformats.org/presentationml/2006/main" xmlns:r="http://schemas.openxmlformats.org/officeDocument/2006/relationships">
+  <p:cSld>
+    <p:spTree>
+      <p:nvGrpSpPr>
+        <p:cNvPr id="1" name=""/>
+        <p:cNvGrpSpPr/>
+        <p:nvPr/>
+      </p:nvGrpSpPr>
+      <p:grpSpPr/>
+      <p:sp>
+        <p:nvSpPr>
+          <p:cNvPr id="2" name="Text 0"/>
+          <p:cNvSpPr/>
+          <p:nvPr/>
+        </p:nvSpPr>
+        <p:spPr>
+          <a:xfrm>
+            <a:off x="566928" y="329184"/>
+            <a:ext cx="10515600" cy="310896"/>
+          </a:xfrm>
+          <a:prstGeom prst="rect">
+            <a:avLst/>
+          </a:prstGeom>
+          <a:noFill/>
+          <a:ln/>
+        </p:spPr>
+        <p:txBody>
+          <a:bodyPr wrap="square" lIns="0" tIns="0" rIns="0" bIns="0" rtlCol="0" anchor="ctr"/>
+          <a:lstStyle/>
+          <a:p>
+            <a:pPr algn="l" indent="0" marL="0">
+              <a:buNone/>
+            </a:pPr>
+            <a:r>
+              <a:rPr lang="en-US" sz="1100" b="1" spc="150" kern="0" dirty="0">
+                <a:solidFill>
+                  <a:srgbClr val="AD1457"/>
+                </a:solidFill>
+                <a:latin typeface="Calibri" pitchFamily="34" charset="0"/>
+                <a:ea typeface="Calibri" pitchFamily="34" charset="-122"/>
+                <a:cs typeface="Calibri" pitchFamily="34" charset="-120"/>
+              </a:rPr>
+              <a:t>TRANSFUSION MEDICINE   ·   BOARD REVIEW  ·  Q1</a:t>
+            </a:r>
+            <a:endParaRPr lang="en-US" sz="1100" dirty="0"/>
+          </a:p>
+        </p:txBody>
+      </p:sp>
+      <p:sp>
+        <p:nvSpPr>
+          <p:cNvPr id="3" name="Text 1"/>
+          <p:cNvSpPr/>
+          <p:nvPr/>
+        </p:nvSpPr>
+        <p:spPr>
+          <a:xfrm>
+            <a:off x="566928" y="713232"/>
+            <a:ext cx="11064240" cy="749808"/>
+          </a:xfrm>
+          <a:prstGeom prst="rect">
+            <a:avLst/>
+          </a:prstGeom>
+          <a:noFill/>
+          <a:ln/>
+        </p:spPr>
+        <p:txBody>
+          <a:bodyPr wrap="square" lIns="0" tIns="0" rIns="0" bIns="0" rtlCol="0" anchor="ctr"/>
+          <a:lstStyle/>
+          <a:p>
+            <a:pPr algn="l" indent="0" marL="0">
+              <a:buNone/>
+            </a:pPr>
+            <a:r>
+              <a:rPr lang="en-US" sz="2600" b="1" dirty="0">
+                <a:solidFill>
+                  <a:srgbClr val="0E3A5F"/>
+                </a:solidFill>
+                <a:latin typeface="Calibri" pitchFamily="34" charset="0"/>
+                <a:ea typeface="Calibri" pitchFamily="34" charset="-122"/>
+                <a:cs typeface="Calibri" pitchFamily="34" charset="-120"/>
+              </a:rPr>
+              <a:t>Board-Style Review</a:t>
+            </a:r>
+            <a:endParaRPr lang="en-US" sz="2600" dirty="0"/>
+          </a:p>
+        </p:txBody>
+      </p:sp>
+      <p:sp>
+        <p:nvSpPr>
+          <p:cNvPr id="4" name="Text 2"/>
+          <p:cNvSpPr/>
+          <p:nvPr/>
+        </p:nvSpPr>
+        <p:spPr>
+          <a:xfrm>
+            <a:off x="566928" y="1417320"/>
+            <a:ext cx="11057839" cy="914400"/>
+          </a:xfrm>
+          <a:prstGeom prst="rect">
+            <a:avLst/>
+          </a:prstGeom>
+          <a:noFill/>
+          <a:ln/>
+        </p:spPr>
+        <p:txBody>
+          <a:bodyPr wrap="square" lIns="0" tIns="0" rIns="0" bIns="0" rtlCol="0" anchor="t"/>
+          <a:lstStyle/>
+          <a:p>
+            <a:pPr algn="l" indent="0" marL="0">
+              <a:lnSpc>
+                <a:spcPct val="105000"/>
+              </a:lnSpc>
+              <a:buNone/>
+            </a:pPr>
+            <a:r>
+              <a:rPr lang="en-US" sz="1450" b="1" dirty="0">
+                <a:solidFill>
+                  <a:srgbClr val="1B2A38"/>
+                </a:solidFill>
+                <a:latin typeface="Calibri" pitchFamily="34" charset="0"/>
+                <a:ea typeface="Calibri" pitchFamily="34" charset="-122"/>
+                <a:cs typeface="Calibri" pitchFamily="34" charset="-120"/>
+              </a:rPr>
+              <a:t>After delivery of an Rh-positive infant by an Rh-negative mother, a large fetomaternal hemorrhage is detected. What determines the RhIG dose?</a:t>
+            </a:r>
+            <a:endParaRPr lang="en-US" sz="1450" dirty="0"/>
+          </a:p>
+        </p:txBody>
+      </p:sp>
+      <p:sp>
+        <p:nvSpPr>
+          <p:cNvPr id="5" name="Text 3"/>
+          <p:cNvSpPr/>
+          <p:nvPr/>
+        </p:nvSpPr>
+        <p:spPr>
+          <a:xfrm>
+            <a:off x="658368" y="2395728"/>
+            <a:ext cx="6192390" cy="3017520"/>
+          </a:xfrm>
+          <a:prstGeom prst="rect">
+            <a:avLst/>
+          </a:prstGeom>
+          <a:noFill/>
+          <a:ln/>
+        </p:spPr>
+        <p:txBody>
+          <a:bodyPr wrap="square" lIns="0" tIns="0" rIns="0" bIns="0" rtlCol="0" anchor="t"/>
+          <a:lstStyle/>
+          <a:p>
+            <a:pPr algn="l" indent="0" marL="0">
+              <a:spcAft>
+                <a:spcPts val="600"/>
+              </a:spcAft>
+              <a:buNone/>
+            </a:pPr>
+            <a:r>
+              <a:rPr lang="en-US" sz="1350" dirty="0">
+                <a:solidFill>
+                  <a:srgbClr val="33444F"/>
+                </a:solidFill>
+                <a:latin typeface="Calibri" pitchFamily="34" charset="0"/>
+                <a:ea typeface="Calibri" pitchFamily="34" charset="-122"/>
+                <a:cs typeface="Calibri" pitchFamily="34" charset="-120"/>
+              </a:rPr>
+              <a:t>A. Maternal weight</a:t>
+            </a:r>
+            <a:endParaRPr lang="en-US" sz="1350" dirty="0"/>
+          </a:p>
+          <a:p>
+            <a:pPr algn="l" indent="0" marL="0">
+              <a:spcAft>
+                <a:spcPts val="600"/>
+              </a:spcAft>
+              <a:buNone/>
+            </a:pPr>
+            <a:r>
+              <a:rPr lang="en-US" sz="1350" b="1" dirty="0">
+                <a:solidFill>
+                  <a:srgbClr val="7A0E3C"/>
+                </a:solidFill>
+                <a:latin typeface="Calibri" pitchFamily="34" charset="0"/>
+                <a:ea typeface="Calibri" pitchFamily="34" charset="-122"/>
+                <a:cs typeface="Calibri" pitchFamily="34" charset="-120"/>
+              </a:rPr>
+              <a:t>B. The quantified volume of fetal cells (Kleihauer-Betke or flow)</a:t>
+            </a:r>
+            <a:endParaRPr lang="en-US" sz="1350" dirty="0"/>
+          </a:p>
+          <a:p>
+            <a:pPr algn="l" indent="0" marL="0">
+              <a:spcAft>
+                <a:spcPts val="600"/>
+              </a:spcAft>
+              <a:buNone/>
+            </a:pPr>
+            <a:r>
+              <a:rPr lang="en-US" sz="1350" dirty="0">
+                <a:solidFill>
+                  <a:srgbClr val="33444F"/>
+                </a:solidFill>
+                <a:latin typeface="Calibri" pitchFamily="34" charset="0"/>
+                <a:ea typeface="Calibri" pitchFamily="34" charset="-122"/>
+                <a:cs typeface="Calibri" pitchFamily="34" charset="-120"/>
+              </a:rPr>
+              <a:t>C. Infant bilirubin</a:t>
+            </a:r>
+            <a:endParaRPr lang="en-US" sz="1350" dirty="0"/>
+          </a:p>
+          <a:p>
+            <a:pPr algn="l" indent="0" marL="0">
+              <a:spcAft>
+                <a:spcPts val="600"/>
+              </a:spcAft>
+              <a:buNone/>
+            </a:pPr>
+            <a:r>
+              <a:rPr lang="en-US" sz="1350" dirty="0">
+                <a:solidFill>
+                  <a:srgbClr val="33444F"/>
+                </a:solidFill>
+                <a:latin typeface="Calibri" pitchFamily="34" charset="0"/>
+                <a:ea typeface="Calibri" pitchFamily="34" charset="-122"/>
+                <a:cs typeface="Calibri" pitchFamily="34" charset="-120"/>
+              </a:rPr>
+              <a:t>D. Maternal antibody titer</a:t>
+            </a:r>
+            <a:endParaRPr lang="en-US" sz="1350" dirty="0"/>
+          </a:p>
+          <a:p>
+            <a:pPr algn="l" indent="0" marL="0">
+              <a:spcAft>
+                <a:spcPts val="600"/>
+              </a:spcAft>
+              <a:buNone/>
+            </a:pPr>
+            <a:r>
+              <a:rPr lang="en-US" sz="1350" dirty="0">
+                <a:solidFill>
+                  <a:srgbClr val="33444F"/>
+                </a:solidFill>
+                <a:latin typeface="Calibri" pitchFamily="34" charset="0"/>
+                <a:ea typeface="Calibri" pitchFamily="34" charset="-122"/>
+                <a:cs typeface="Calibri" pitchFamily="34" charset="-120"/>
+              </a:rPr>
+              <a:t>E. Gestational age only</a:t>
+            </a:r>
+            <a:endParaRPr lang="en-US" sz="1350" dirty="0"/>
+          </a:p>
+        </p:txBody>
+      </p:sp>
+      <p:sp>
+        <p:nvSpPr>
+          <p:cNvPr id="6" name="Shape 4"/>
+          <p:cNvSpPr/>
+          <p:nvPr/>
+        </p:nvSpPr>
+        <p:spPr>
+          <a:xfrm>
+            <a:off x="7201632" y="2395728"/>
+            <a:ext cx="4423136" cy="3246120"/>
+          </a:xfrm>
+          <a:prstGeom prst="roundRect">
+            <a:avLst>
+              <a:gd name="adj" fmla="val 2535"/>
+            </a:avLst>
+          </a:prstGeom>
+          <a:solidFill>
+            <a:srgbClr val="F8E7EF"/>
+          </a:solidFill>
+          <a:ln/>
+          <a:effectLst>
+            <a:outerShdw sx="100000" sy="100000" kx="0" ky="0" algn="bl" rotWithShape="0" blurRad="88900" dist="25400" dir="5400000">
+              <a:srgbClr val="22303C">
+                <a:alpha val="12000"/>
+              </a:srgbClr>
+            </a:outerShdw>
+          </a:effectLst>
+        </p:spPr>
+        <p:txBody>
+          <a:bodyPr/>
+          <a:p/>
+        </p:txBody>
+      </p:sp>
+      <p:sp>
+        <p:nvSpPr>
+          <p:cNvPr id="7" name="Text 5"/>
+          <p:cNvSpPr/>
+          <p:nvPr/>
+        </p:nvSpPr>
+        <p:spPr>
+          <a:xfrm>
+            <a:off x="7439376" y="2578608"/>
+            <a:ext cx="3965936" cy="457200"/>
+          </a:xfrm>
+          <a:prstGeom prst="rect">
+            <a:avLst/>
+          </a:prstGeom>
+          <a:noFill/>
+          <a:ln/>
+        </p:spPr>
+        <p:txBody>
+          <a:bodyPr wrap="square" lIns="0" tIns="0" rIns="0" bIns="0" rtlCol="0" anchor="ctr"/>
+          <a:lstStyle/>
+          <a:p>
+            <a:pPr indent="0" marL="0">
+              <a:buNone/>
+            </a:pPr>
+            <a:r>
+              <a:rPr lang="en-US" sz="1500" b="1" dirty="0">
+                <a:solidFill>
+                  <a:srgbClr val="AD1457"/>
+                </a:solidFill>
+                <a:latin typeface="Calibri" pitchFamily="34" charset="0"/>
+                <a:ea typeface="Calibri" pitchFamily="34" charset="-122"/>
+                <a:cs typeface="Calibri" pitchFamily="34" charset="-120"/>
+              </a:rPr>
+              <a:t>ANSWER  </a:t>
+            </a:r>
+            <a:pPr indent="0" marL="0">
+              <a:buNone/>
+            </a:pPr>
+            <a:r>
+              <a:rPr lang="en-US" sz="1500" b="1" dirty="0">
+                <a:solidFill>
+                  <a:srgbClr val="1B2A38"/>
+                </a:solidFill>
+                <a:latin typeface="Calibri" pitchFamily="34" charset="0"/>
+                <a:ea typeface="Calibri" pitchFamily="34" charset="-122"/>
+                <a:cs typeface="Calibri" pitchFamily="34" charset="-120"/>
+              </a:rPr>
+              <a:t>B — Quantified fetal-cell volume</a:t>
+            </a:r>
+            <a:endParaRPr lang="en-US" sz="1500" dirty="0"/>
+          </a:p>
+        </p:txBody>
+      </p:sp>
+      <p:sp>
+        <p:nvSpPr>
+          <p:cNvPr id="8" name="Text 6"/>
+          <p:cNvSpPr/>
+          <p:nvPr/>
+        </p:nvSpPr>
+        <p:spPr>
+          <a:xfrm>
+            <a:off x="7439376" y="3127248"/>
+            <a:ext cx="3947648" cy="2377440"/>
+          </a:xfrm>
+          <a:prstGeom prst="rect">
+            <a:avLst/>
+          </a:prstGeom>
+          <a:noFill/>
+          <a:ln/>
+        </p:spPr>
+        <p:txBody>
+          <a:bodyPr wrap="square" lIns="0" tIns="0" rIns="0" bIns="0" rtlCol="0" anchor="t"/>
+          <a:lstStyle/>
+          <a:p>
+            <a:pPr algn="l" indent="0" marL="0">
+              <a:lnSpc>
+                <a:spcPct val="108000"/>
+              </a:lnSpc>
+              <a:buNone/>
+            </a:pPr>
+            <a:r>
+              <a:rPr lang="en-US" sz="1250" dirty="0">
+                <a:solidFill>
+                  <a:srgbClr val="33444F"/>
+                </a:solidFill>
+                <a:latin typeface="Calibri" pitchFamily="34" charset="0"/>
+                <a:ea typeface="Calibri" pitchFamily="34" charset="-122"/>
+                <a:cs typeface="Calibri" pitchFamily="34" charset="-120"/>
+              </a:rPr>
+              <a:t>RhIG dose is based on the volume of fetomaternal hemorrhage, measured by Kleihauer-Betke or flow cytometry; large bleeds require additional vials beyond the standard dose.</a:t>
+            </a:r>
+            <a:endParaRPr lang="en-US" sz="1250" dirty="0"/>
+          </a:p>
+        </p:txBody>
+      </p:sp>
+      <p:sp>
+        <p:nvSpPr>
+          <p:cNvPr id="9" name="Text 7"/>
+          <p:cNvSpPr/>
+          <p:nvPr/>
+        </p:nvSpPr>
+        <p:spPr>
+          <a:xfrm>
+            <a:off x="566928" y="6473952"/>
+            <a:ext cx="7772400" cy="274320"/>
+          </a:xfrm>
+          <a:prstGeom prst="rect">
+            <a:avLst/>
+          </a:prstGeom>
+          <a:noFill/>
+          <a:ln/>
+        </p:spPr>
+        <p:txBody>
+          <a:bodyPr wrap="square" lIns="0" tIns="0" rIns="0" bIns="0" rtlCol="0" anchor="ctr"/>
+          <a:lstStyle/>
+          <a:p>
+            <a:pPr algn="l" indent="0" marL="0">
+              <a:buNone/>
+            </a:pPr>
+            <a:r>
+              <a:rPr lang="en-US" sz="850" dirty="0">
+                <a:solidFill>
+                  <a:srgbClr val="9AA8B4"/>
+                </a:solidFill>
+                <a:latin typeface="Calibri" pitchFamily="34" charset="0"/>
+                <a:ea typeface="Calibri" pitchFamily="34" charset="-122"/>
+                <a:cs typeface="Calibri" pitchFamily="34" charset="-120"/>
+              </a:rPr>
+              <a:t>Makassed General Hospital  ·  Department of Laboratory Medicine</a:t>
+            </a:r>
+            <a:endParaRPr lang="en-US" sz="850" dirty="0"/>
+          </a:p>
+        </p:txBody>
+      </p:sp>
+      <p:sp>
+        <p:nvSpPr>
+          <p:cNvPr id="10" name="Text 8"/>
+          <p:cNvSpPr/>
+          <p:nvPr/>
+        </p:nvSpPr>
+        <p:spPr>
+          <a:xfrm>
+            <a:off x="9814255" y="6473952"/>
+            <a:ext cx="1828800" cy="274320"/>
+          </a:xfrm>
+          <a:prstGeom prst="rect">
+            <a:avLst/>
+          </a:prstGeom>
+          <a:noFill/>
+          <a:ln/>
+        </p:spPr>
+        <p:txBody>
+          <a:bodyPr wrap="square" lIns="0" tIns="0" rIns="0" bIns="0" rtlCol="0" anchor="ctr"/>
+          <a:lstStyle/>
+          <a:p>
+            <a:pPr algn="r" indent="0" marL="0">
+              <a:buNone/>
+            </a:pPr>
+            <a:r>
+              <a:rPr lang="en-US" sz="850" dirty="0">
+                <a:solidFill>
+                  <a:srgbClr val="9AA8B4"/>
+                </a:solidFill>
+                <a:latin typeface="Calibri" pitchFamily="34" charset="0"/>
+                <a:ea typeface="Calibri" pitchFamily="34" charset="-122"/>
+                <a:cs typeface="Calibri" pitchFamily="34" charset="-120"/>
+              </a:rPr>
+              <a:t>CP Lecture Series</a:t>
+            </a:r>
+            <a:pPr algn="r" indent="0" marL="0">
+              <a:buNone/>
+            </a:pPr>
+            <a:r>
+              <a:rPr lang="en-US" sz="850" dirty="0">
+                <a:solidFill>
+                  <a:srgbClr val="DCE4EC"/>
+                </a:solidFill>
+                <a:latin typeface="Calibri" pitchFamily="34" charset="0"/>
+                <a:ea typeface="Calibri" pitchFamily="34" charset="-122"/>
+                <a:cs typeface="Calibri" pitchFamily="34" charset="-120"/>
+              </a:rPr>
+              <a:t>   ·   </a:t>
+            </a:r>
+            <a:pPr algn="r" indent="0" marL="0">
+              <a:buNone/>
+            </a:pPr>
+            <a:r>
+              <a:rPr lang="en-US" sz="850" b="1" dirty="0">
+                <a:solidFill>
+                  <a:srgbClr val="AD1457"/>
+                </a:solidFill>
+                <a:latin typeface="Calibri" pitchFamily="34" charset="0"/>
+                <a:ea typeface="Calibri" pitchFamily="34" charset="-122"/>
+                <a:cs typeface="Calibri" pitchFamily="34" charset="-120"/>
+              </a:rPr>
+              <a:t>20</a:t>
+            </a:r>
+            <a:endParaRPr lang="en-US" sz="850" dirty="0"/>
+          </a:p>
+        </p:txBody>
+      </p:sp>
+    </p:spTree>
+  </p:cSld>
+  <p:clrMapOvr>
+    <a:masterClrMapping/>
+  </p:clrMapOvr>
+</p:sld>
+</file>
+
 <file path=ppt/slides/slide4.xml><?xml version="1.0" encoding="utf-8"?>
 <p:sld xmlns:a="http://schemas.openxmlformats.org/drawingml/2006/main" xmlns:r="http://schemas.openxmlformats.org/officeDocument/2006/relationships" xmlns:p="http://schemas.openxmlformats.org/presentationml/2006/main">
   <p:cSld name="Slide 4">
@@ -15475,6 +17175,10 @@
             </a:outerShdw>
           </a:effectLst>
         </p:spPr>
+        <p:txBody>
+          <a:bodyPr/>
+          <a:p/>
+        </p:txBody>
       </p:sp>
       <p:sp>
         <p:nvSpPr>
@@ -15502,6 +17206,10 @@
             </a:outerShdw>
           </a:effectLst>
         </p:spPr>
+        <p:txBody>
+          <a:bodyPr/>
+          <a:p/>
+        </p:txBody>
       </p:sp>
       <p:sp>
         <p:nvSpPr>
@@ -15616,6 +17324,10 @@
           </a:solidFill>
           <a:ln/>
         </p:spPr>
+        <p:txBody>
+          <a:bodyPr/>
+          <a:p/>
+        </p:txBody>
       </p:sp>
       <p:sp>
         <p:nvSpPr>
@@ -15643,6 +17355,10 @@
             </a:outerShdw>
           </a:effectLst>
         </p:spPr>
+        <p:txBody>
+          <a:bodyPr/>
+          <a:p/>
+        </p:txBody>
       </p:sp>
       <p:sp>
         <p:nvSpPr>
@@ -15764,6 +17480,10 @@
             </a:outerShdw>
           </a:effectLst>
         </p:spPr>
+        <p:txBody>
+          <a:bodyPr/>
+          <a:p/>
+        </p:txBody>
       </p:sp>
       <p:sp>
         <p:nvSpPr>
@@ -15791,6 +17511,10 @@
             </a:outerShdw>
           </a:effectLst>
         </p:spPr>
+        <p:txBody>
+          <a:bodyPr/>
+          <a:p/>
+        </p:txBody>
       </p:sp>
       <p:sp>
         <p:nvSpPr>
@@ -15905,6 +17629,10 @@
           </a:solidFill>
           <a:ln/>
         </p:spPr>
+        <p:txBody>
+          <a:bodyPr/>
+          <a:p/>
+        </p:txBody>
       </p:sp>
       <p:sp>
         <p:nvSpPr>
@@ -15932,6 +17660,10 @@
             </a:outerShdw>
           </a:effectLst>
         </p:spPr>
+        <p:txBody>
+          <a:bodyPr/>
+          <a:p/>
+        </p:txBody>
       </p:sp>
       <p:sp>
         <p:nvSpPr>
@@ -16053,6 +17785,10 @@
             </a:outerShdw>
           </a:effectLst>
         </p:spPr>
+        <p:txBody>
+          <a:bodyPr/>
+          <a:p/>
+        </p:txBody>
       </p:sp>
       <p:sp>
         <p:nvSpPr>
@@ -16080,6 +17816,10 @@
             </a:outerShdw>
           </a:effectLst>
         </p:spPr>
+        <p:txBody>
+          <a:bodyPr/>
+          <a:p/>
+        </p:txBody>
       </p:sp>
       <p:sp>
         <p:nvSpPr>
@@ -16332,6 +18072,10 @@
           </a:solidFill>
           <a:ln/>
         </p:spPr>
+        <p:txBody>
+          <a:bodyPr/>
+          <a:p/>
+        </p:txBody>
       </p:sp>
       <p:sp>
         <p:nvSpPr>
@@ -16354,6 +18098,10 @@
           </a:solidFill>
           <a:ln/>
         </p:spPr>
+        <p:txBody>
+          <a:bodyPr/>
+          <a:p/>
+        </p:txBody>
       </p:sp>
       <p:sp>
         <p:nvSpPr>
@@ -16615,6 +18363,10 @@
             </a:outerShdw>
           </a:effectLst>
         </p:spPr>
+        <p:txBody>
+          <a:bodyPr/>
+          <a:p/>
+        </p:txBody>
       </p:sp>
       <p:pic>
         <p:nvPicPr>
@@ -16923,6 +18675,10 @@
             </a:outerShdw>
           </a:effectLst>
         </p:spPr>
+        <p:txBody>
+          <a:bodyPr/>
+          <a:p/>
+        </p:txBody>
       </p:sp>
       <p:sp>
         <p:nvSpPr>
@@ -17097,6 +18853,10 @@
             </a:outerShdw>
           </a:effectLst>
         </p:spPr>
+        <p:txBody>
+          <a:bodyPr/>
+          <a:p/>
+        </p:txBody>
       </p:sp>
       <p:sp>
         <p:nvSpPr>
@@ -17492,6 +19252,10 @@
             </a:outerShdw>
           </a:effectLst>
         </p:spPr>
+        <p:txBody>
+          <a:bodyPr/>
+          <a:p/>
+        </p:txBody>
       </p:sp>
       <p:pic>
         <p:nvPicPr>
@@ -17800,6 +19564,10 @@
             </a:outerShdw>
           </a:effectLst>
         </p:spPr>
+        <p:txBody>
+          <a:bodyPr/>
+          <a:p/>
+        </p:txBody>
       </p:sp>
       <p:sp>
         <p:nvSpPr>
@@ -17974,6 +19742,10 @@
             </a:outerShdw>
           </a:effectLst>
         </p:spPr>
+        <p:txBody>
+          <a:bodyPr/>
+          <a:p/>
+        </p:txBody>
       </p:sp>
       <p:sp>
         <p:nvSpPr>
